--- a/reference_content/Slides/text_gen_lstm.pptx
+++ b/reference_content/Slides/text_gen_lstm.pptx
@@ -6,27 +6,41 @@
   </p:sldMasterIdLst>
   <p:sldIdLst>
     <p:sldId id="270" r:id="rId2"/>
-    <p:sldId id="256" r:id="rId3"/>
-    <p:sldId id="258" r:id="rId4"/>
-    <p:sldId id="259" r:id="rId5"/>
-    <p:sldId id="272" r:id="rId6"/>
-    <p:sldId id="273" r:id="rId7"/>
-    <p:sldId id="257" r:id="rId8"/>
-    <p:sldId id="260" r:id="rId9"/>
-    <p:sldId id="262" r:id="rId10"/>
-    <p:sldId id="261" r:id="rId11"/>
-    <p:sldId id="263" r:id="rId12"/>
-    <p:sldId id="264" r:id="rId13"/>
-    <p:sldId id="274" r:id="rId14"/>
-    <p:sldId id="265" r:id="rId15"/>
-    <p:sldId id="266" r:id="rId16"/>
-    <p:sldId id="267" r:id="rId17"/>
-    <p:sldId id="277" r:id="rId18"/>
-    <p:sldId id="268" r:id="rId19"/>
-    <p:sldId id="275" r:id="rId20"/>
-    <p:sldId id="271" r:id="rId21"/>
-    <p:sldId id="269" r:id="rId22"/>
-    <p:sldId id="276" r:id="rId23"/>
+    <p:sldId id="278" r:id="rId3"/>
+    <p:sldId id="256" r:id="rId4"/>
+    <p:sldId id="258" r:id="rId5"/>
+    <p:sldId id="259" r:id="rId6"/>
+    <p:sldId id="289" r:id="rId7"/>
+    <p:sldId id="272" r:id="rId8"/>
+    <p:sldId id="273" r:id="rId9"/>
+    <p:sldId id="257" r:id="rId10"/>
+    <p:sldId id="262" r:id="rId11"/>
+    <p:sldId id="260" r:id="rId12"/>
+    <p:sldId id="283" r:id="rId13"/>
+    <p:sldId id="279" r:id="rId14"/>
+    <p:sldId id="261" r:id="rId15"/>
+    <p:sldId id="285" r:id="rId16"/>
+    <p:sldId id="284" r:id="rId17"/>
+    <p:sldId id="263" r:id="rId18"/>
+    <p:sldId id="264" r:id="rId19"/>
+    <p:sldId id="286" r:id="rId20"/>
+    <p:sldId id="288" r:id="rId21"/>
+    <p:sldId id="274" r:id="rId22"/>
+    <p:sldId id="287" r:id="rId23"/>
+    <p:sldId id="265" r:id="rId24"/>
+    <p:sldId id="266" r:id="rId25"/>
+    <p:sldId id="267" r:id="rId26"/>
+    <p:sldId id="280" r:id="rId27"/>
+    <p:sldId id="281" r:id="rId28"/>
+    <p:sldId id="277" r:id="rId29"/>
+    <p:sldId id="268" r:id="rId30"/>
+    <p:sldId id="275" r:id="rId31"/>
+    <p:sldId id="290" r:id="rId32"/>
+    <p:sldId id="282" r:id="rId33"/>
+    <p:sldId id="291" r:id="rId34"/>
+    <p:sldId id="271" r:id="rId35"/>
+    <p:sldId id="269" r:id="rId36"/>
+    <p:sldId id="276" r:id="rId37"/>
   </p:sldIdLst>
   <p:sldSz cx="12192000" cy="6858000"/>
   <p:notesSz cx="6858000" cy="9144000"/>
@@ -272,7 +286,7 @@
           <a:p>
             <a:fld id="{34DF02AF-78C0-C14E-AD4B-AA630D193019}" type="datetimeFigureOut">
               <a:rPr lang="en-US" smtClean="0"/>
-              <a:t>4/15/25</a:t>
+              <a:t>4/7/26</a:t>
             </a:fld>
             <a:endParaRPr lang="en-US"/>
           </a:p>
@@ -483,7 +497,7 @@
           <a:p>
             <a:fld id="{34DF02AF-78C0-C14E-AD4B-AA630D193019}" type="datetimeFigureOut">
               <a:rPr lang="en-US" smtClean="0"/>
-              <a:t>4/15/25</a:t>
+              <a:t>4/7/26</a:t>
             </a:fld>
             <a:endParaRPr lang="en-US"/>
           </a:p>
@@ -698,7 +712,7 @@
           <a:p>
             <a:fld id="{34DF02AF-78C0-C14E-AD4B-AA630D193019}" type="datetimeFigureOut">
               <a:rPr lang="en-US" smtClean="0"/>
-              <a:t>4/15/25</a:t>
+              <a:t>4/7/26</a:t>
             </a:fld>
             <a:endParaRPr lang="en-US"/>
           </a:p>
@@ -899,7 +913,7 @@
           <a:p>
             <a:fld id="{34DF02AF-78C0-C14E-AD4B-AA630D193019}" type="datetimeFigureOut">
               <a:rPr lang="en-US" smtClean="0"/>
-              <a:t>4/15/25</a:t>
+              <a:t>4/7/26</a:t>
             </a:fld>
             <a:endParaRPr lang="en-US"/>
           </a:p>
@@ -1178,7 +1192,7 @@
           <a:p>
             <a:fld id="{34DF02AF-78C0-C14E-AD4B-AA630D193019}" type="datetimeFigureOut">
               <a:rPr lang="en-US" smtClean="0"/>
-              <a:t>4/15/25</a:t>
+              <a:t>4/7/26</a:t>
             </a:fld>
             <a:endParaRPr lang="en-US"/>
           </a:p>
@@ -1446,7 +1460,7 @@
           <a:p>
             <a:fld id="{34DF02AF-78C0-C14E-AD4B-AA630D193019}" type="datetimeFigureOut">
               <a:rPr lang="en-US" smtClean="0"/>
-              <a:t>4/15/25</a:t>
+              <a:t>4/7/26</a:t>
             </a:fld>
             <a:endParaRPr lang="en-US"/>
           </a:p>
@@ -1862,7 +1876,7 @@
           <a:p>
             <a:fld id="{34DF02AF-78C0-C14E-AD4B-AA630D193019}" type="datetimeFigureOut">
               <a:rPr lang="en-US" smtClean="0"/>
-              <a:t>4/15/25</a:t>
+              <a:t>4/7/26</a:t>
             </a:fld>
             <a:endParaRPr lang="en-US"/>
           </a:p>
@@ -2011,7 +2025,7 @@
           <a:p>
             <a:fld id="{34DF02AF-78C0-C14E-AD4B-AA630D193019}" type="datetimeFigureOut">
               <a:rPr lang="en-US" smtClean="0"/>
-              <a:t>4/15/25</a:t>
+              <a:t>4/7/26</a:t>
             </a:fld>
             <a:endParaRPr lang="en-US"/>
           </a:p>
@@ -2137,7 +2151,7 @@
           <a:p>
             <a:fld id="{34DF02AF-78C0-C14E-AD4B-AA630D193019}" type="datetimeFigureOut">
               <a:rPr lang="en-US" smtClean="0"/>
-              <a:t>4/15/25</a:t>
+              <a:t>4/7/26</a:t>
             </a:fld>
             <a:endParaRPr lang="en-US"/>
           </a:p>
@@ -2388,7 +2402,7 @@
           <a:p>
             <a:fld id="{34DF02AF-78C0-C14E-AD4B-AA630D193019}" type="datetimeFigureOut">
               <a:rPr lang="en-US" smtClean="0"/>
-              <a:t>4/15/25</a:t>
+              <a:t>4/7/26</a:t>
             </a:fld>
             <a:endParaRPr lang="en-US"/>
           </a:p>
@@ -2833,7 +2847,7 @@
           <a:p>
             <a:fld id="{34DF02AF-78C0-C14E-AD4B-AA630D193019}" type="datetimeFigureOut">
               <a:rPr lang="en-US" smtClean="0"/>
-              <a:t>4/15/25</a:t>
+              <a:t>4/7/26</a:t>
             </a:fld>
             <a:endParaRPr lang="en-US"/>
           </a:p>
@@ -3000,6 +3014,13 @@
             <a:schemeClr val="lt1"/>
           </a:fontRef>
         </p:style>
+        <p:txBody>
+          <a:bodyPr/>
+          <a:lstStyle/>
+          <a:p>
+            <a:endParaRPr lang="en-US"/>
+          </a:p>
+        </p:txBody>
       </p:sp>
       <p:pic>
         <p:nvPicPr>
@@ -3160,7 +3181,7 @@
           <a:p>
             <a:fld id="{34DF02AF-78C0-C14E-AD4B-AA630D193019}" type="datetimeFigureOut">
               <a:rPr lang="en-US" smtClean="0"/>
-              <a:t>4/15/25</a:t>
+              <a:t>4/7/26</a:t>
             </a:fld>
             <a:endParaRPr lang="en-US"/>
           </a:p>
@@ -3789,6 +3810,508 @@
           <p:cNvPr id="2" name="Title 1">
             <a:extLst>
               <a:ext uri="{FF2B5EF4-FFF2-40B4-BE49-F238E27FC236}">
+                <a16:creationId xmlns:a16="http://schemas.microsoft.com/office/drawing/2014/main" id="{579C3E18-8339-2DD9-4BED-8AEE908C849A}"/>
+              </a:ext>
+            </a:extLst>
+          </p:cNvPr>
+          <p:cNvSpPr>
+            <a:spLocks noGrp="1"/>
+          </p:cNvSpPr>
+          <p:nvPr>
+            <p:ph type="title"/>
+          </p:nvPr>
+        </p:nvSpPr>
+        <p:spPr/>
+        <p:txBody>
+          <a:bodyPr/>
+          <a:lstStyle/>
+          <a:p>
+            <a:endParaRPr lang="en-US"/>
+          </a:p>
+        </p:txBody>
+      </p:sp>
+      <p:sp>
+        <p:nvSpPr>
+          <p:cNvPr id="3" name="Content Placeholder 2">
+            <a:extLst>
+              <a:ext uri="{FF2B5EF4-FFF2-40B4-BE49-F238E27FC236}">
+                <a16:creationId xmlns:a16="http://schemas.microsoft.com/office/drawing/2014/main" id="{C87CC73E-455F-0224-0F28-2E8A36AF8856}"/>
+              </a:ext>
+            </a:extLst>
+          </p:cNvPr>
+          <p:cNvSpPr>
+            <a:spLocks noGrp="1"/>
+          </p:cNvSpPr>
+          <p:nvPr>
+            <p:ph idx="1"/>
+          </p:nvPr>
+        </p:nvSpPr>
+        <p:spPr/>
+        <p:txBody>
+          <a:bodyPr/>
+          <a:lstStyle/>
+          <a:p>
+            <a:endParaRPr lang="en-US"/>
+          </a:p>
+        </p:txBody>
+      </p:sp>
+      <p:pic>
+        <p:nvPicPr>
+          <p:cNvPr id="2050" name="Picture 2" descr="Text Generation using LSTM">
+            <a:extLst>
+              <a:ext uri="{FF2B5EF4-FFF2-40B4-BE49-F238E27FC236}">
+                <a16:creationId xmlns:a16="http://schemas.microsoft.com/office/drawing/2014/main" id="{38AC7608-B39E-C2E6-D83B-4ED54AD42F6F}"/>
+              </a:ext>
+            </a:extLst>
+          </p:cNvPr>
+          <p:cNvPicPr>
+            <a:picLocks noChangeAspect="1" noChangeArrowheads="1"/>
+          </p:cNvPicPr>
+          <p:nvPr/>
+        </p:nvPicPr>
+        <p:blipFill>
+          <a:blip r:embed="rId2">
+            <a:extLst>
+              <a:ext uri="{28A0092B-C50C-407E-A947-70E740481C1C}">
+                <a14:useLocalDpi xmlns:a14="http://schemas.microsoft.com/office/drawing/2010/main" val="0"/>
+              </a:ext>
+            </a:extLst>
+          </a:blip>
+          <a:srcRect/>
+          <a:stretch>
+            <a:fillRect/>
+          </a:stretch>
+        </p:blipFill>
+        <p:spPr bwMode="auto">
+          <a:xfrm>
+            <a:off x="0" y="1333500"/>
+            <a:ext cx="12192000" cy="4191000"/>
+          </a:xfrm>
+          <a:prstGeom prst="rect">
+            <a:avLst/>
+          </a:prstGeom>
+          <a:noFill/>
+          <a:extLst>
+            <a:ext uri="{909E8E84-426E-40DD-AFC4-6F175D3DCCD1}">
+              <a14:hiddenFill xmlns:a14="http://schemas.microsoft.com/office/drawing/2010/main">
+                <a:solidFill>
+                  <a:srgbClr val="FFFFFF"/>
+                </a:solidFill>
+              </a14:hiddenFill>
+            </a:ext>
+          </a:extLst>
+        </p:spPr>
+      </p:pic>
+    </p:spTree>
+    <p:extLst>
+      <p:ext uri="{BB962C8B-B14F-4D97-AF65-F5344CB8AC3E}">
+        <p14:creationId xmlns:p14="http://schemas.microsoft.com/office/powerpoint/2010/main" val="119335658"/>
+      </p:ext>
+    </p:extLst>
+  </p:cSld>
+  <p:clrMapOvr>
+    <a:masterClrMapping/>
+  </p:clrMapOvr>
+</p:sld>
+</file>
+
+<file path=ppt/slides/slide11.xml><?xml version="1.0" encoding="utf-8"?>
+<p:sld xmlns:a="http://schemas.openxmlformats.org/drawingml/2006/main" xmlns:r="http://schemas.openxmlformats.org/officeDocument/2006/relationships" xmlns:p="http://schemas.openxmlformats.org/presentationml/2006/main">
+  <p:cSld>
+    <p:spTree>
+      <p:nvGrpSpPr>
+        <p:cNvPr id="1" name=""/>
+        <p:cNvGrpSpPr/>
+        <p:nvPr/>
+      </p:nvGrpSpPr>
+      <p:grpSpPr>
+        <a:xfrm>
+          <a:off x="0" y="0"/>
+          <a:ext cx="0" cy="0"/>
+          <a:chOff x="0" y="0"/>
+          <a:chExt cx="0" cy="0"/>
+        </a:xfrm>
+      </p:grpSpPr>
+      <p:sp>
+        <p:nvSpPr>
+          <p:cNvPr id="2" name="Title 1">
+            <a:extLst>
+              <a:ext uri="{FF2B5EF4-FFF2-40B4-BE49-F238E27FC236}">
+                <a16:creationId xmlns:a16="http://schemas.microsoft.com/office/drawing/2014/main" id="{302C9F35-C90B-D7C2-C0E2-FCFBC469A15D}"/>
+              </a:ext>
+            </a:extLst>
+          </p:cNvPr>
+          <p:cNvSpPr>
+            <a:spLocks noGrp="1"/>
+          </p:cNvSpPr>
+          <p:nvPr>
+            <p:ph type="title"/>
+          </p:nvPr>
+        </p:nvSpPr>
+        <p:spPr/>
+        <p:txBody>
+          <a:bodyPr/>
+          <a:lstStyle/>
+          <a:p>
+            <a:r>
+              <a:rPr lang="en-US" dirty="0"/>
+              <a:t>Forget predicting, what about Generating Text?</a:t>
+            </a:r>
+          </a:p>
+        </p:txBody>
+      </p:sp>
+      <p:sp>
+        <p:nvSpPr>
+          <p:cNvPr id="3" name="Content Placeholder 2">
+            <a:extLst>
+              <a:ext uri="{FF2B5EF4-FFF2-40B4-BE49-F238E27FC236}">
+                <a16:creationId xmlns:a16="http://schemas.microsoft.com/office/drawing/2014/main" id="{0925384A-745F-0025-99F6-F0EF8325AB34}"/>
+              </a:ext>
+            </a:extLst>
+          </p:cNvPr>
+          <p:cNvSpPr>
+            <a:spLocks noGrp="1"/>
+          </p:cNvSpPr>
+          <p:nvPr>
+            <p:ph idx="1"/>
+          </p:nvPr>
+        </p:nvSpPr>
+        <p:spPr>
+          <a:xfrm>
+            <a:off x="1451579" y="2015732"/>
+            <a:ext cx="9603275" cy="4037749"/>
+          </a:xfrm>
+        </p:spPr>
+        <p:txBody>
+          <a:bodyPr/>
+          <a:lstStyle/>
+          <a:p>
+            <a:r>
+              <a:rPr lang="en-US" dirty="0"/>
+              <a:t>We can apply these LSTM models to predict the next word. </a:t>
+            </a:r>
+          </a:p>
+          <a:p>
+            <a:r>
+              <a:rPr lang="en-US" dirty="0"/>
+              <a:t>We can then tell it to generate that word!</a:t>
+            </a:r>
+          </a:p>
+          <a:p>
+            <a:r>
+              <a:rPr lang="en-US" dirty="0" err="1"/>
+              <a:t>ChatGPT</a:t>
+            </a:r>
+            <a:r>
+              <a:rPr lang="en-US" dirty="0"/>
+              <a:t>, watch out! </a:t>
+            </a:r>
+          </a:p>
+          <a:p>
+            <a:r>
+              <a:rPr lang="en-US" dirty="0"/>
+              <a:t>We just need to setup the data properly:</a:t>
+            </a:r>
+          </a:p>
+          <a:p>
+            <a:pPr lvl="1"/>
+            <a:r>
+              <a:rPr lang="en-US" dirty="0"/>
+              <a:t>The input is the previous set of words. </a:t>
+            </a:r>
+          </a:p>
+          <a:p>
+            <a:pPr lvl="1"/>
+            <a:r>
+              <a:rPr lang="en-US" dirty="0"/>
+              <a:t>The output is the next word. </a:t>
+            </a:r>
+          </a:p>
+          <a:p>
+            <a:pPr lvl="1"/>
+            <a:endParaRPr lang="en-US" dirty="0"/>
+          </a:p>
+        </p:txBody>
+      </p:sp>
+    </p:spTree>
+    <p:extLst>
+      <p:ext uri="{BB962C8B-B14F-4D97-AF65-F5344CB8AC3E}">
+        <p14:creationId xmlns:p14="http://schemas.microsoft.com/office/powerpoint/2010/main" val="1926563131"/>
+      </p:ext>
+    </p:extLst>
+  </p:cSld>
+  <p:clrMapOvr>
+    <a:masterClrMapping/>
+  </p:clrMapOvr>
+</p:sld>
+</file>
+
+<file path=ppt/slides/slide12.xml><?xml version="1.0" encoding="utf-8"?>
+<p:sld xmlns:a="http://schemas.openxmlformats.org/drawingml/2006/main" xmlns:r="http://schemas.openxmlformats.org/officeDocument/2006/relationships" xmlns:p="http://schemas.openxmlformats.org/presentationml/2006/main" show="0">
+  <p:cSld>
+    <p:spTree>
+      <p:nvGrpSpPr>
+        <p:cNvPr id="1" name=""/>
+        <p:cNvGrpSpPr/>
+        <p:nvPr/>
+      </p:nvGrpSpPr>
+      <p:grpSpPr>
+        <a:xfrm>
+          <a:off x="0" y="0"/>
+          <a:ext cx="0" cy="0"/>
+          <a:chOff x="0" y="0"/>
+          <a:chExt cx="0" cy="0"/>
+        </a:xfrm>
+      </p:grpSpPr>
+      <p:sp>
+        <p:nvSpPr>
+          <p:cNvPr id="2" name="Title 1">
+            <a:extLst>
+              <a:ext uri="{FF2B5EF4-FFF2-40B4-BE49-F238E27FC236}">
+                <a16:creationId xmlns:a16="http://schemas.microsoft.com/office/drawing/2014/main" id="{2BB58599-856D-E296-4560-348526EE6C6D}"/>
+              </a:ext>
+            </a:extLst>
+          </p:cNvPr>
+          <p:cNvSpPr>
+            <a:spLocks noGrp="1"/>
+          </p:cNvSpPr>
+          <p:nvPr>
+            <p:ph type="title"/>
+          </p:nvPr>
+        </p:nvSpPr>
+        <p:spPr/>
+        <p:txBody>
+          <a:bodyPr/>
+          <a:lstStyle/>
+          <a:p>
+            <a:r>
+              <a:rPr lang="en-US" dirty="0"/>
+              <a:t>Text Generation Training Data</a:t>
+            </a:r>
+          </a:p>
+        </p:txBody>
+      </p:sp>
+      <p:sp>
+        <p:nvSpPr>
+          <p:cNvPr id="3" name="Content Placeholder 2">
+            <a:extLst>
+              <a:ext uri="{FF2B5EF4-FFF2-40B4-BE49-F238E27FC236}">
+                <a16:creationId xmlns:a16="http://schemas.microsoft.com/office/drawing/2014/main" id="{DE7497CF-D293-2A4F-5D69-95F17BA40D63}"/>
+              </a:ext>
+            </a:extLst>
+          </p:cNvPr>
+          <p:cNvSpPr>
+            <a:spLocks noGrp="1"/>
+          </p:cNvSpPr>
+          <p:nvPr>
+            <p:ph idx="1"/>
+          </p:nvPr>
+        </p:nvSpPr>
+        <p:spPr/>
+        <p:txBody>
+          <a:bodyPr/>
+          <a:lstStyle/>
+          <a:p>
+            <a:endParaRPr lang="en-US"/>
+          </a:p>
+        </p:txBody>
+      </p:sp>
+    </p:spTree>
+    <p:extLst>
+      <p:ext uri="{BB962C8B-B14F-4D97-AF65-F5344CB8AC3E}">
+        <p14:creationId xmlns:p14="http://schemas.microsoft.com/office/powerpoint/2010/main" val="64634618"/>
+      </p:ext>
+    </p:extLst>
+  </p:cSld>
+  <p:clrMapOvr>
+    <a:masterClrMapping/>
+  </p:clrMapOvr>
+</p:sld>
+</file>
+
+<file path=ppt/slides/slide13.xml><?xml version="1.0" encoding="utf-8"?>
+<p:sld xmlns:a="http://schemas.openxmlformats.org/drawingml/2006/main" xmlns:r="http://schemas.openxmlformats.org/officeDocument/2006/relationships" xmlns:p="http://schemas.openxmlformats.org/presentationml/2006/main">
+  <p:cSld>
+    <p:spTree>
+      <p:nvGrpSpPr>
+        <p:cNvPr id="1" name=""/>
+        <p:cNvGrpSpPr/>
+        <p:nvPr/>
+      </p:nvGrpSpPr>
+      <p:grpSpPr>
+        <a:xfrm>
+          <a:off x="0" y="0"/>
+          <a:ext cx="0" cy="0"/>
+          <a:chOff x="0" y="0"/>
+          <a:chExt cx="0" cy="0"/>
+        </a:xfrm>
+      </p:grpSpPr>
+      <p:sp>
+        <p:nvSpPr>
+          <p:cNvPr id="2" name="Title 1">
+            <a:extLst>
+              <a:ext uri="{FF2B5EF4-FFF2-40B4-BE49-F238E27FC236}">
+                <a16:creationId xmlns:a16="http://schemas.microsoft.com/office/drawing/2014/main" id="{FE0C460E-CC17-57E6-1E20-68CE69922657}"/>
+              </a:ext>
+            </a:extLst>
+          </p:cNvPr>
+          <p:cNvSpPr>
+            <a:spLocks noGrp="1"/>
+          </p:cNvSpPr>
+          <p:nvPr>
+            <p:ph type="title"/>
+          </p:nvPr>
+        </p:nvSpPr>
+        <p:spPr/>
+        <p:txBody>
+          <a:bodyPr/>
+          <a:lstStyle/>
+          <a:p>
+            <a:r>
+              <a:rPr lang="en-US" dirty="0"/>
+              <a:t>Features and Targets</a:t>
+            </a:r>
+          </a:p>
+        </p:txBody>
+      </p:sp>
+      <p:sp>
+        <p:nvSpPr>
+          <p:cNvPr id="3" name="Content Placeholder 2">
+            <a:extLst>
+              <a:ext uri="{FF2B5EF4-FFF2-40B4-BE49-F238E27FC236}">
+                <a16:creationId xmlns:a16="http://schemas.microsoft.com/office/drawing/2014/main" id="{0E89CF84-A295-691C-0D58-8A6B1DA93485}"/>
+              </a:ext>
+            </a:extLst>
+          </p:cNvPr>
+          <p:cNvSpPr>
+            <a:spLocks noGrp="1"/>
+          </p:cNvSpPr>
+          <p:nvPr>
+            <p:ph idx="1"/>
+          </p:nvPr>
+        </p:nvSpPr>
+        <p:spPr>
+          <a:xfrm>
+            <a:off x="1229711" y="1853753"/>
+            <a:ext cx="10405242" cy="4199728"/>
+          </a:xfrm>
+        </p:spPr>
+        <p:txBody>
+          <a:bodyPr>
+            <a:normAutofit lnSpcReduction="10000"/>
+          </a:bodyPr>
+          <a:lstStyle/>
+          <a:p>
+            <a:r>
+              <a:rPr lang="en-US" dirty="0"/>
+              <a:t>Text generation data is a little different than normal, but mostly like a time series. </a:t>
+            </a:r>
+          </a:p>
+          <a:p>
+            <a:pPr lvl="1"/>
+            <a:r>
+              <a:rPr lang="en-US" dirty="0"/>
+              <a:t>We have “some” previous tokens as features, the next token is the target. </a:t>
+            </a:r>
+          </a:p>
+          <a:p>
+            <a:r>
+              <a:rPr lang="en-US" dirty="0"/>
+              <a:t>That some can vary:</a:t>
+            </a:r>
+          </a:p>
+          <a:p>
+            <a:pPr lvl="1"/>
+            <a:r>
+              <a:rPr lang="en-US" dirty="0"/>
+              <a:t>You need to predict the second word in a response as well as the 2,456</a:t>
+            </a:r>
+            <a:r>
+              <a:rPr lang="en-US" baseline="30000" dirty="0"/>
+              <a:t>th</a:t>
+            </a:r>
+            <a:r>
+              <a:rPr lang="en-US" dirty="0"/>
+              <a:t> word. </a:t>
+            </a:r>
+          </a:p>
+          <a:p>
+            <a:r>
+              <a:rPr lang="en-US" dirty="0"/>
+              <a:t>Can make a sliding window, like a time series (easier with big text chunks).</a:t>
+            </a:r>
+          </a:p>
+          <a:p>
+            <a:r>
+              <a:rPr lang="en-US" dirty="0"/>
+              <a:t>Can also do a similar thing within each small document (row). </a:t>
+            </a:r>
+          </a:p>
+          <a:p>
+            <a:pPr lvl="1"/>
+            <a:r>
+              <a:rPr lang="en-US" dirty="0"/>
+              <a:t>Like the picture. </a:t>
+            </a:r>
+          </a:p>
+          <a:p>
+            <a:r>
+              <a:rPr lang="en-US" dirty="0"/>
+              <a:t>Details kind of don’t matter, we want the model to learn to predict the next word. The </a:t>
+            </a:r>
+            <a:r>
+              <a:rPr lang="en-US" i="1" dirty="0"/>
+              <a:t>exact</a:t>
+            </a:r>
+            <a:r>
+              <a:rPr lang="en-US" dirty="0"/>
+              <a:t> subset of data it sees can vary a lot, as long as it is representative.  </a:t>
+            </a:r>
+          </a:p>
+          <a:p>
+            <a:pPr lvl="1"/>
+            <a:r>
+              <a:rPr lang="en-US" dirty="0"/>
+              <a:t>E.g. under time constraints, is predicting every word of that sentence important, or seeing more…</a:t>
+            </a:r>
+          </a:p>
+        </p:txBody>
+      </p:sp>
+    </p:spTree>
+    <p:extLst>
+      <p:ext uri="{BB962C8B-B14F-4D97-AF65-F5344CB8AC3E}">
+        <p14:creationId xmlns:p14="http://schemas.microsoft.com/office/powerpoint/2010/main" val="428035062"/>
+      </p:ext>
+    </p:extLst>
+  </p:cSld>
+  <p:clrMapOvr>
+    <a:masterClrMapping/>
+  </p:clrMapOvr>
+</p:sld>
+</file>
+
+<file path=ppt/slides/slide14.xml><?xml version="1.0" encoding="utf-8"?>
+<p:sld xmlns:a="http://schemas.openxmlformats.org/drawingml/2006/main" xmlns:r="http://schemas.openxmlformats.org/officeDocument/2006/relationships" xmlns:p="http://schemas.openxmlformats.org/presentationml/2006/main">
+  <p:cSld>
+    <p:spTree>
+      <p:nvGrpSpPr>
+        <p:cNvPr id="1" name=""/>
+        <p:cNvGrpSpPr/>
+        <p:nvPr/>
+      </p:nvGrpSpPr>
+      <p:grpSpPr>
+        <a:xfrm>
+          <a:off x="0" y="0"/>
+          <a:ext cx="0" cy="0"/>
+          <a:chOff x="0" y="0"/>
+          <a:chExt cx="0" cy="0"/>
+        </a:xfrm>
+      </p:grpSpPr>
+      <p:sp>
+        <p:nvSpPr>
+          <p:cNvPr id="2" name="Title 1">
+            <a:extLst>
+              <a:ext uri="{FF2B5EF4-FFF2-40B4-BE49-F238E27FC236}">
                 <a16:creationId xmlns:a16="http://schemas.microsoft.com/office/drawing/2014/main" id="{1F4CF4EA-3A46-26F9-792C-FD0FF8FF9B38}"/>
               </a:ext>
             </a:extLst>
@@ -3912,7 +4435,193 @@
 </p:sld>
 </file>
 
-<file path=ppt/slides/slide11.xml><?xml version="1.0" encoding="utf-8"?>
+<file path=ppt/slides/slide15.xml><?xml version="1.0" encoding="utf-8"?>
+<p:sld xmlns:a="http://schemas.openxmlformats.org/drawingml/2006/main" xmlns:r="http://schemas.openxmlformats.org/officeDocument/2006/relationships" xmlns:p="http://schemas.openxmlformats.org/presentationml/2006/main" show="0">
+  <p:cSld>
+    <p:spTree>
+      <p:nvGrpSpPr>
+        <p:cNvPr id="1" name=""/>
+        <p:cNvGrpSpPr/>
+        <p:nvPr/>
+      </p:nvGrpSpPr>
+      <p:grpSpPr>
+        <a:xfrm>
+          <a:off x="0" y="0"/>
+          <a:ext cx="0" cy="0"/>
+          <a:chOff x="0" y="0"/>
+          <a:chExt cx="0" cy="0"/>
+        </a:xfrm>
+      </p:grpSpPr>
+      <p:sp>
+        <p:nvSpPr>
+          <p:cNvPr id="2" name="Title 1">
+            <a:extLst>
+              <a:ext uri="{FF2B5EF4-FFF2-40B4-BE49-F238E27FC236}">
+                <a16:creationId xmlns:a16="http://schemas.microsoft.com/office/drawing/2014/main" id="{490F052F-5454-1103-70AD-27E770C0E68B}"/>
+              </a:ext>
+            </a:extLst>
+          </p:cNvPr>
+          <p:cNvSpPr>
+            <a:spLocks noGrp="1"/>
+          </p:cNvSpPr>
+          <p:nvPr>
+            <p:ph type="title"/>
+          </p:nvPr>
+        </p:nvSpPr>
+        <p:spPr/>
+        <p:txBody>
+          <a:bodyPr/>
+          <a:lstStyle/>
+          <a:p>
+            <a:r>
+              <a:rPr lang="en-US" dirty="0"/>
+              <a:t>Dataset Construction</a:t>
+            </a:r>
+          </a:p>
+        </p:txBody>
+      </p:sp>
+      <p:sp>
+        <p:nvSpPr>
+          <p:cNvPr id="3" name="Content Placeholder 2">
+            <a:extLst>
+              <a:ext uri="{FF2B5EF4-FFF2-40B4-BE49-F238E27FC236}">
+                <a16:creationId xmlns:a16="http://schemas.microsoft.com/office/drawing/2014/main" id="{582B6ADB-0821-845A-B130-F6B72753149F}"/>
+              </a:ext>
+            </a:extLst>
+          </p:cNvPr>
+          <p:cNvSpPr>
+            <a:spLocks noGrp="1"/>
+          </p:cNvSpPr>
+          <p:nvPr>
+            <p:ph idx="1"/>
+          </p:nvPr>
+        </p:nvSpPr>
+        <p:spPr/>
+        <p:txBody>
+          <a:bodyPr/>
+          <a:lstStyle/>
+          <a:p>
+            <a:r>
+              <a:rPr lang="en-US" dirty="0"/>
+              <a:t>Our dataset will be a bunch of these items:</a:t>
+            </a:r>
+          </a:p>
+          <a:p>
+            <a:pPr lvl="1"/>
+            <a:r>
+              <a:rPr lang="en-US" dirty="0"/>
+              <a:t>Previous next features. </a:t>
+            </a:r>
+          </a:p>
+          <a:p>
+            <a:pPr lvl="1"/>
+            <a:r>
+              <a:rPr lang="en-US" dirty="0"/>
+              <a:t>Next token target. </a:t>
+            </a:r>
+          </a:p>
+          <a:p>
+            <a:endParaRPr lang="en-US" dirty="0"/>
+          </a:p>
+        </p:txBody>
+      </p:sp>
+    </p:spTree>
+    <p:extLst>
+      <p:ext uri="{BB962C8B-B14F-4D97-AF65-F5344CB8AC3E}">
+        <p14:creationId xmlns:p14="http://schemas.microsoft.com/office/powerpoint/2010/main" val="3820345258"/>
+      </p:ext>
+    </p:extLst>
+  </p:cSld>
+  <p:clrMapOvr>
+    <a:masterClrMapping/>
+  </p:clrMapOvr>
+</p:sld>
+</file>
+
+<file path=ppt/slides/slide16.xml><?xml version="1.0" encoding="utf-8"?>
+<p:sld xmlns:a="http://schemas.openxmlformats.org/drawingml/2006/main" xmlns:r="http://schemas.openxmlformats.org/officeDocument/2006/relationships" xmlns:p="http://schemas.openxmlformats.org/presentationml/2006/main">
+  <p:cSld>
+    <p:spTree>
+      <p:nvGrpSpPr>
+        <p:cNvPr id="1" name=""/>
+        <p:cNvGrpSpPr/>
+        <p:nvPr/>
+      </p:nvGrpSpPr>
+      <p:grpSpPr>
+        <a:xfrm>
+          <a:off x="0" y="0"/>
+          <a:ext cx="0" cy="0"/>
+          <a:chOff x="0" y="0"/>
+          <a:chExt cx="0" cy="0"/>
+        </a:xfrm>
+      </p:grpSpPr>
+      <p:sp>
+        <p:nvSpPr>
+          <p:cNvPr id="2" name="Title 1">
+            <a:extLst>
+              <a:ext uri="{FF2B5EF4-FFF2-40B4-BE49-F238E27FC236}">
+                <a16:creationId xmlns:a16="http://schemas.microsoft.com/office/drawing/2014/main" id="{01F92ACE-1200-C987-71FE-1BC93216309F}"/>
+              </a:ext>
+            </a:extLst>
+          </p:cNvPr>
+          <p:cNvSpPr>
+            <a:spLocks noGrp="1"/>
+          </p:cNvSpPr>
+          <p:nvPr>
+            <p:ph type="title"/>
+          </p:nvPr>
+        </p:nvSpPr>
+        <p:spPr/>
+        <p:txBody>
+          <a:bodyPr/>
+          <a:lstStyle/>
+          <a:p>
+            <a:r>
+              <a:rPr lang="en-US" dirty="0"/>
+              <a:t>Data Preparation</a:t>
+            </a:r>
+          </a:p>
+        </p:txBody>
+      </p:sp>
+      <p:sp>
+        <p:nvSpPr>
+          <p:cNvPr id="3" name="Content Placeholder 2">
+            <a:extLst>
+              <a:ext uri="{FF2B5EF4-FFF2-40B4-BE49-F238E27FC236}">
+                <a16:creationId xmlns:a16="http://schemas.microsoft.com/office/drawing/2014/main" id="{0A973987-6338-D94A-A236-B20695469CB2}"/>
+              </a:ext>
+            </a:extLst>
+          </p:cNvPr>
+          <p:cNvSpPr>
+            <a:spLocks noGrp="1"/>
+          </p:cNvSpPr>
+          <p:nvPr>
+            <p:ph idx="1"/>
+          </p:nvPr>
+        </p:nvSpPr>
+        <p:spPr/>
+        <p:txBody>
+          <a:bodyPr/>
+          <a:lstStyle/>
+          <a:p>
+            <a:endParaRPr lang="en-US"/>
+          </a:p>
+        </p:txBody>
+      </p:sp>
+    </p:spTree>
+    <p:extLst>
+      <p:ext uri="{BB962C8B-B14F-4D97-AF65-F5344CB8AC3E}">
+        <p14:creationId xmlns:p14="http://schemas.microsoft.com/office/powerpoint/2010/main" val="3918706187"/>
+      </p:ext>
+    </p:extLst>
+  </p:cSld>
+  <p:clrMapOvr>
+    <a:masterClrMapping/>
+  </p:clrMapOvr>
+</p:sld>
+</file>
+
+<file path=ppt/slides/slide17.xml><?xml version="1.0" encoding="utf-8"?>
 <p:sld xmlns:a="http://schemas.openxmlformats.org/drawingml/2006/main" xmlns:r="http://schemas.openxmlformats.org/officeDocument/2006/relationships" xmlns:p="http://schemas.openxmlformats.org/presentationml/2006/main">
   <p:cSld>
     <p:spTree>
@@ -4057,7 +4766,7 @@
 </p:sld>
 </file>
 
-<file path=ppt/slides/slide12.xml><?xml version="1.0" encoding="utf-8"?>
+<file path=ppt/slides/slide18.xml><?xml version="1.0" encoding="utf-8"?>
 <p:sld xmlns:a="http://schemas.openxmlformats.org/drawingml/2006/main" xmlns:r="http://schemas.openxmlformats.org/officeDocument/2006/relationships" xmlns:p="http://schemas.openxmlformats.org/presentationml/2006/main">
   <p:cSld>
     <p:spTree>
@@ -4130,7 +4839,7 @@
           <a:p>
             <a:r>
               <a:rPr lang="en-US" dirty="0"/>
-              <a:t>After padding, we have a usable dataset. </a:t>
+              <a:t>After (left) padding, we have a usable dataset. </a:t>
             </a:r>
           </a:p>
           <a:p>
@@ -4144,7 +4853,7 @@
             <a:pPr lvl="1"/>
             <a:r>
               <a:rPr lang="en-US" dirty="0"/>
-              <a:t>The target is the next token, we can train. </a:t>
+              <a:t>The target is the next token, we can train. (Blue is data)</a:t>
             </a:r>
           </a:p>
           <a:p>
@@ -4211,7 +4920,481 @@
 </p:sld>
 </file>
 
-<file path=ppt/slides/slide13.xml><?xml version="1.0" encoding="utf-8"?>
+<file path=ppt/slides/slide19.xml><?xml version="1.0" encoding="utf-8"?>
+<p:sld xmlns:a="http://schemas.openxmlformats.org/drawingml/2006/main" xmlns:r="http://schemas.openxmlformats.org/officeDocument/2006/relationships" xmlns:p="http://schemas.openxmlformats.org/presentationml/2006/main">
+  <p:cSld>
+    <p:spTree>
+      <p:nvGrpSpPr>
+        <p:cNvPr id="1" name=""/>
+        <p:cNvGrpSpPr/>
+        <p:nvPr/>
+      </p:nvGrpSpPr>
+      <p:grpSpPr>
+        <a:xfrm>
+          <a:off x="0" y="0"/>
+          <a:ext cx="0" cy="0"/>
+          <a:chOff x="0" y="0"/>
+          <a:chExt cx="0" cy="0"/>
+        </a:xfrm>
+      </p:grpSpPr>
+      <p:sp>
+        <p:nvSpPr>
+          <p:cNvPr id="2" name="Title 1">
+            <a:extLst>
+              <a:ext uri="{FF2B5EF4-FFF2-40B4-BE49-F238E27FC236}">
+                <a16:creationId xmlns:a16="http://schemas.microsoft.com/office/drawing/2014/main" id="{85290218-FE5A-2063-B0E7-F64FAFFE66E3}"/>
+              </a:ext>
+            </a:extLst>
+          </p:cNvPr>
+          <p:cNvSpPr>
+            <a:spLocks noGrp="1"/>
+          </p:cNvSpPr>
+          <p:nvPr>
+            <p:ph type="title"/>
+          </p:nvPr>
+        </p:nvSpPr>
+        <p:spPr/>
+        <p:txBody>
+          <a:bodyPr/>
+          <a:lstStyle/>
+          <a:p>
+            <a:r>
+              <a:rPr lang="en-US" dirty="0"/>
+              <a:t>Sequences and Packing</a:t>
+            </a:r>
+          </a:p>
+        </p:txBody>
+      </p:sp>
+      <p:sp>
+        <p:nvSpPr>
+          <p:cNvPr id="3" name="Content Placeholder 2">
+            <a:extLst>
+              <a:ext uri="{FF2B5EF4-FFF2-40B4-BE49-F238E27FC236}">
+                <a16:creationId xmlns:a16="http://schemas.microsoft.com/office/drawing/2014/main" id="{CC88E0DD-F8CF-892A-E021-4B4D64283AFD}"/>
+              </a:ext>
+            </a:extLst>
+          </p:cNvPr>
+          <p:cNvSpPr>
+            <a:spLocks noGrp="1"/>
+          </p:cNvSpPr>
+          <p:nvPr>
+            <p:ph idx="1"/>
+          </p:nvPr>
+        </p:nvSpPr>
+        <p:spPr>
+          <a:xfrm>
+            <a:off x="5317958" y="1853753"/>
+            <a:ext cx="6874042" cy="4199727"/>
+          </a:xfrm>
+        </p:spPr>
+        <p:txBody>
+          <a:bodyPr/>
+          <a:lstStyle/>
+          <a:p>
+            <a:r>
+              <a:rPr lang="en-US" dirty="0"/>
+              <a:t>In </a:t>
+            </a:r>
+            <a:r>
+              <a:rPr lang="en-US" dirty="0" err="1"/>
+              <a:t>pytorch</a:t>
+            </a:r>
+            <a:r>
+              <a:rPr lang="en-US" dirty="0"/>
+              <a:t>, we probably want packed sequences for efficiency. </a:t>
+            </a:r>
+          </a:p>
+          <a:p>
+            <a:pPr lvl="1"/>
+            <a:r>
+              <a:rPr lang="en-US" dirty="0"/>
+              <a:t>Directs model to ignore the padded bits and save time. </a:t>
+            </a:r>
+          </a:p>
+          <a:p>
+            <a:pPr lvl="1"/>
+            <a:r>
+              <a:rPr lang="en-US" dirty="0"/>
+              <a:t>We just feed the function padded sequences. </a:t>
+            </a:r>
+          </a:p>
+          <a:p>
+            <a:r>
+              <a:rPr lang="en-US" dirty="0"/>
+              <a:t>Here, we’ll also </a:t>
+            </a:r>
+            <a:r>
+              <a:rPr lang="en-US" dirty="0" err="1"/>
+              <a:t>pad_packed_sequences</a:t>
+            </a:r>
+            <a:r>
+              <a:rPr lang="en-US" dirty="0"/>
+              <a:t>:</a:t>
+            </a:r>
+          </a:p>
+          <a:p>
+            <a:pPr lvl="1"/>
+            <a:r>
+              <a:rPr lang="en-US" dirty="0"/>
+              <a:t>Does the opposite, restores the padded parts. </a:t>
+            </a:r>
+          </a:p>
+          <a:p>
+            <a:r>
+              <a:rPr lang="en-US" dirty="0"/>
+              <a:t>This is ‘normal’ usage:</a:t>
+            </a:r>
+          </a:p>
+          <a:p>
+            <a:pPr lvl="1"/>
+            <a:r>
+              <a:rPr lang="en-US" dirty="0"/>
+              <a:t>Pack to model</a:t>
+            </a:r>
+          </a:p>
+          <a:p>
+            <a:pPr lvl="1"/>
+            <a:r>
+              <a:rPr lang="en-US" dirty="0"/>
+              <a:t>Pad back to original format. </a:t>
+            </a:r>
+          </a:p>
+          <a:p>
+            <a:pPr lvl="1"/>
+            <a:r>
+              <a:rPr lang="en-US" dirty="0"/>
+              <a:t>In the last example we grabbed the hidden state directly because it was binomial and we needed to manipulate it. </a:t>
+            </a:r>
+          </a:p>
+          <a:p>
+            <a:endParaRPr lang="en-US" dirty="0"/>
+          </a:p>
+        </p:txBody>
+      </p:sp>
+      <p:pic>
+        <p:nvPicPr>
+          <p:cNvPr id="5" name="Picture 4">
+            <a:extLst>
+              <a:ext uri="{FF2B5EF4-FFF2-40B4-BE49-F238E27FC236}">
+                <a16:creationId xmlns:a16="http://schemas.microsoft.com/office/drawing/2014/main" id="{C90719DD-4E2A-EDAB-EFA5-330176DE51AA}"/>
+              </a:ext>
+            </a:extLst>
+          </p:cNvPr>
+          <p:cNvPicPr>
+            <a:picLocks noChangeAspect="1"/>
+          </p:cNvPicPr>
+          <p:nvPr/>
+        </p:nvPicPr>
+        <p:blipFill>
+          <a:blip r:embed="rId2"/>
+          <a:srcRect r="31579"/>
+          <a:stretch>
+            <a:fillRect/>
+          </a:stretch>
+        </p:blipFill>
+        <p:spPr>
+          <a:xfrm>
+            <a:off x="0" y="1853754"/>
+            <a:ext cx="5317958" cy="4158804"/>
+          </a:xfrm>
+          <a:prstGeom prst="rect">
+            <a:avLst/>
+          </a:prstGeom>
+        </p:spPr>
+      </p:pic>
+    </p:spTree>
+    <p:extLst>
+      <p:ext uri="{BB962C8B-B14F-4D97-AF65-F5344CB8AC3E}">
+        <p14:creationId xmlns:p14="http://schemas.microsoft.com/office/powerpoint/2010/main" val="4081307927"/>
+      </p:ext>
+    </p:extLst>
+  </p:cSld>
+  <p:clrMapOvr>
+    <a:masterClrMapping/>
+  </p:clrMapOvr>
+</p:sld>
+</file>
+
+<file path=ppt/slides/slide2.xml><?xml version="1.0" encoding="utf-8"?>
+<p:sld xmlns:a="http://schemas.openxmlformats.org/drawingml/2006/main" xmlns:r="http://schemas.openxmlformats.org/officeDocument/2006/relationships" xmlns:p="http://schemas.openxmlformats.org/presentationml/2006/main">
+  <p:cSld>
+    <p:spTree>
+      <p:nvGrpSpPr>
+        <p:cNvPr id="1" name=""/>
+        <p:cNvGrpSpPr/>
+        <p:nvPr/>
+      </p:nvGrpSpPr>
+      <p:grpSpPr>
+        <a:xfrm>
+          <a:off x="0" y="0"/>
+          <a:ext cx="0" cy="0"/>
+          <a:chOff x="0" y="0"/>
+          <a:chExt cx="0" cy="0"/>
+        </a:xfrm>
+      </p:grpSpPr>
+      <p:sp>
+        <p:nvSpPr>
+          <p:cNvPr id="2" name="Title 1">
+            <a:extLst>
+              <a:ext uri="{FF2B5EF4-FFF2-40B4-BE49-F238E27FC236}">
+                <a16:creationId xmlns:a16="http://schemas.microsoft.com/office/drawing/2014/main" id="{124CBBD1-B727-4634-4B8D-A2881076A2D7}"/>
+              </a:ext>
+            </a:extLst>
+          </p:cNvPr>
+          <p:cNvSpPr>
+            <a:spLocks noGrp="1"/>
+          </p:cNvSpPr>
+          <p:nvPr>
+            <p:ph type="title"/>
+          </p:nvPr>
+        </p:nvSpPr>
+        <p:spPr>
+          <a:xfrm>
+            <a:off x="1451579" y="519289"/>
+            <a:ext cx="3944157" cy="1334465"/>
+          </a:xfrm>
+        </p:spPr>
+        <p:txBody>
+          <a:bodyPr>
+            <a:normAutofit/>
+          </a:bodyPr>
+          <a:lstStyle/>
+          <a:p>
+            <a:r>
+              <a:rPr lang="en-US" dirty="0"/>
+              <a:t>A little Data science Humor</a:t>
+            </a:r>
+          </a:p>
+        </p:txBody>
+      </p:sp>
+      <p:sp>
+        <p:nvSpPr>
+          <p:cNvPr id="3" name="Content Placeholder 2">
+            <a:extLst>
+              <a:ext uri="{FF2B5EF4-FFF2-40B4-BE49-F238E27FC236}">
+                <a16:creationId xmlns:a16="http://schemas.microsoft.com/office/drawing/2014/main" id="{560C0656-3E75-4202-17A2-19A3AED7A538}"/>
+              </a:ext>
+            </a:extLst>
+          </p:cNvPr>
+          <p:cNvSpPr>
+            <a:spLocks noGrp="1"/>
+          </p:cNvSpPr>
+          <p:nvPr>
+            <p:ph idx="1"/>
+          </p:nvPr>
+        </p:nvSpPr>
+        <p:spPr/>
+        <p:txBody>
+          <a:bodyPr/>
+          <a:lstStyle/>
+          <a:p>
+            <a:endParaRPr lang="en-US"/>
+          </a:p>
+        </p:txBody>
+      </p:sp>
+      <p:pic>
+        <p:nvPicPr>
+          <p:cNvPr id="1026" name="Picture 2">
+            <a:extLst>
+              <a:ext uri="{FF2B5EF4-FFF2-40B4-BE49-F238E27FC236}">
+                <a16:creationId xmlns:a16="http://schemas.microsoft.com/office/drawing/2014/main" id="{B678C3F9-B638-34C2-42A1-50BDF5F77A5B}"/>
+              </a:ext>
+            </a:extLst>
+          </p:cNvPr>
+          <p:cNvPicPr>
+            <a:picLocks noChangeAspect="1" noChangeArrowheads="1"/>
+          </p:cNvPicPr>
+          <p:nvPr/>
+        </p:nvPicPr>
+        <p:blipFill rotWithShape="1">
+          <a:blip r:embed="rId2">
+            <a:extLst>
+              <a:ext uri="{28A0092B-C50C-407E-A947-70E740481C1C}">
+                <a14:useLocalDpi xmlns:a14="http://schemas.microsoft.com/office/drawing/2010/main" val="0"/>
+              </a:ext>
+            </a:extLst>
+          </a:blip>
+          <a:srcRect b="9959"/>
+          <a:stretch>
+            <a:fillRect/>
+          </a:stretch>
+        </p:blipFill>
+        <p:spPr bwMode="auto">
+          <a:xfrm>
+            <a:off x="5395736" y="0"/>
+            <a:ext cx="6775050" cy="6479822"/>
+          </a:xfrm>
+          <a:prstGeom prst="rect">
+            <a:avLst/>
+          </a:prstGeom>
+          <a:noFill/>
+          <a:extLst>
+            <a:ext uri="{909E8E84-426E-40DD-AFC4-6F175D3DCCD1}">
+              <a14:hiddenFill xmlns:a14="http://schemas.microsoft.com/office/drawing/2010/main">
+                <a:solidFill>
+                  <a:srgbClr val="FFFFFF"/>
+                </a:solidFill>
+              </a14:hiddenFill>
+            </a:ext>
+          </a:extLst>
+        </p:spPr>
+      </p:pic>
+    </p:spTree>
+    <p:extLst>
+      <p:ext uri="{BB962C8B-B14F-4D97-AF65-F5344CB8AC3E}">
+        <p14:creationId xmlns:p14="http://schemas.microsoft.com/office/powerpoint/2010/main" val="2221038894"/>
+      </p:ext>
+    </p:extLst>
+  </p:cSld>
+  <p:clrMapOvr>
+    <a:masterClrMapping/>
+  </p:clrMapOvr>
+</p:sld>
+</file>
+
+<file path=ppt/slides/slide20.xml><?xml version="1.0" encoding="utf-8"?>
+<p:sld xmlns:a="http://schemas.openxmlformats.org/drawingml/2006/main" xmlns:r="http://schemas.openxmlformats.org/officeDocument/2006/relationships" xmlns:p="http://schemas.openxmlformats.org/presentationml/2006/main">
+  <p:cSld>
+    <p:spTree>
+      <p:nvGrpSpPr>
+        <p:cNvPr id="1" name=""/>
+        <p:cNvGrpSpPr/>
+        <p:nvPr/>
+      </p:nvGrpSpPr>
+      <p:grpSpPr>
+        <a:xfrm>
+          <a:off x="0" y="0"/>
+          <a:ext cx="0" cy="0"/>
+          <a:chOff x="0" y="0"/>
+          <a:chExt cx="0" cy="0"/>
+        </a:xfrm>
+      </p:grpSpPr>
+      <p:sp>
+        <p:nvSpPr>
+          <p:cNvPr id="2" name="Title 1">
+            <a:extLst>
+              <a:ext uri="{FF2B5EF4-FFF2-40B4-BE49-F238E27FC236}">
+                <a16:creationId xmlns:a16="http://schemas.microsoft.com/office/drawing/2014/main" id="{722463FF-2D96-49B5-36CF-349192E46712}"/>
+              </a:ext>
+            </a:extLst>
+          </p:cNvPr>
+          <p:cNvSpPr>
+            <a:spLocks noGrp="1"/>
+          </p:cNvSpPr>
+          <p:nvPr>
+            <p:ph type="title"/>
+          </p:nvPr>
+        </p:nvSpPr>
+        <p:spPr/>
+        <p:txBody>
+          <a:bodyPr/>
+          <a:lstStyle/>
+          <a:p>
+            <a:r>
+              <a:rPr lang="en-US" dirty="0"/>
+              <a:t>Dataset Construction</a:t>
+            </a:r>
+          </a:p>
+        </p:txBody>
+      </p:sp>
+      <p:sp>
+        <p:nvSpPr>
+          <p:cNvPr id="3" name="Content Placeholder 2">
+            <a:extLst>
+              <a:ext uri="{FF2B5EF4-FFF2-40B4-BE49-F238E27FC236}">
+                <a16:creationId xmlns:a16="http://schemas.microsoft.com/office/drawing/2014/main" id="{0D1663AB-2E94-7092-457A-0E5215B72208}"/>
+              </a:ext>
+            </a:extLst>
+          </p:cNvPr>
+          <p:cNvSpPr>
+            <a:spLocks noGrp="1"/>
+          </p:cNvSpPr>
+          <p:nvPr>
+            <p:ph idx="1"/>
+          </p:nvPr>
+        </p:nvSpPr>
+        <p:spPr>
+          <a:xfrm>
+            <a:off x="120317" y="2015732"/>
+            <a:ext cx="5511167" cy="3939900"/>
+          </a:xfrm>
+        </p:spPr>
+        <p:txBody>
+          <a:bodyPr/>
+          <a:lstStyle/>
+          <a:p>
+            <a:r>
+              <a:rPr lang="en-US" dirty="0"/>
+              <a:t>In addition to the data, we need some other info to train. </a:t>
+            </a:r>
+          </a:p>
+          <a:p>
+            <a:pPr lvl="1"/>
+            <a:r>
+              <a:rPr lang="en-US" dirty="0"/>
+              <a:t>Padding and unknown tokens – these are designated placeholders, so model doesn’t choke on new stuff. </a:t>
+            </a:r>
+          </a:p>
+          <a:p>
+            <a:pPr lvl="1"/>
+            <a:r>
+              <a:rPr lang="en-US" dirty="0"/>
+              <a:t>Vocabulary – mapping of token number to word.  </a:t>
+            </a:r>
+          </a:p>
+          <a:p>
+            <a:pPr lvl="1"/>
+            <a:r>
+              <a:rPr lang="en-US" dirty="0"/>
+              <a:t>Vocab size – how many output neurons do we need. </a:t>
+            </a:r>
+          </a:p>
+        </p:txBody>
+      </p:sp>
+      <p:pic>
+        <p:nvPicPr>
+          <p:cNvPr id="4" name="Picture 3">
+            <a:extLst>
+              <a:ext uri="{FF2B5EF4-FFF2-40B4-BE49-F238E27FC236}">
+                <a16:creationId xmlns:a16="http://schemas.microsoft.com/office/drawing/2014/main" id="{6BA753C8-042D-52A1-32EF-82BB37D9F459}"/>
+              </a:ext>
+            </a:extLst>
+          </p:cNvPr>
+          <p:cNvPicPr>
+            <a:picLocks noChangeAspect="1"/>
+          </p:cNvPicPr>
+          <p:nvPr/>
+        </p:nvPicPr>
+        <p:blipFill>
+          <a:blip r:embed="rId2"/>
+          <a:stretch>
+            <a:fillRect/>
+          </a:stretch>
+        </p:blipFill>
+        <p:spPr>
+          <a:xfrm>
+            <a:off x="5631484" y="2277643"/>
+            <a:ext cx="6560516" cy="3416078"/>
+          </a:xfrm>
+          <a:prstGeom prst="rect">
+            <a:avLst/>
+          </a:prstGeom>
+        </p:spPr>
+      </p:pic>
+    </p:spTree>
+    <p:extLst>
+      <p:ext uri="{BB962C8B-B14F-4D97-AF65-F5344CB8AC3E}">
+        <p14:creationId xmlns:p14="http://schemas.microsoft.com/office/powerpoint/2010/main" val="927470794"/>
+      </p:ext>
+    </p:extLst>
+  </p:cSld>
+  <p:clrMapOvr>
+    <a:masterClrMapping/>
+  </p:clrMapOvr>
+</p:sld>
+</file>
+
+<file path=ppt/slides/slide21.xml><?xml version="1.0" encoding="utf-8"?>
 <p:sld xmlns:a="http://schemas.openxmlformats.org/drawingml/2006/main" xmlns:r="http://schemas.openxmlformats.org/officeDocument/2006/relationships" xmlns:p="http://schemas.openxmlformats.org/presentationml/2006/main">
   <p:cSld>
     <p:spTree>
@@ -4386,7 +5569,7 @@
 </p:sld>
 </file>
 
-<file path=ppt/slides/slide14.xml><?xml version="1.0" encoding="utf-8"?>
+<file path=ppt/slides/slide22.xml><?xml version="1.0" encoding="utf-8"?>
 <p:sld xmlns:a="http://schemas.openxmlformats.org/drawingml/2006/main" xmlns:r="http://schemas.openxmlformats.org/officeDocument/2006/relationships" xmlns:p="http://schemas.openxmlformats.org/presentationml/2006/main">
   <p:cSld>
     <p:spTree>
@@ -4408,7 +5591,7 @@
           <p:cNvPr id="2" name="Title 1">
             <a:extLst>
               <a:ext uri="{FF2B5EF4-FFF2-40B4-BE49-F238E27FC236}">
-                <a16:creationId xmlns:a16="http://schemas.microsoft.com/office/drawing/2014/main" id="{38C96FF3-69E9-A64D-99BE-2F7691D36E32}"/>
+                <a16:creationId xmlns:a16="http://schemas.microsoft.com/office/drawing/2014/main" id="{64349F48-8D07-6A60-12C4-4BCB348F5596}"/>
               </a:ext>
             </a:extLst>
           </p:cNvPr>
@@ -4424,10 +5607,7 @@
           <a:bodyPr/>
           <a:lstStyle/>
           <a:p>
-            <a:r>
-              <a:rPr lang="en-US" dirty="0"/>
-              <a:t>Language Model Notes</a:t>
-            </a:r>
+            <a:endParaRPr lang="en-US"/>
           </a:p>
         </p:txBody>
       </p:sp>
@@ -4436,7 +5616,7 @@
           <p:cNvPr id="3" name="Content Placeholder 2">
             <a:extLst>
               <a:ext uri="{FF2B5EF4-FFF2-40B4-BE49-F238E27FC236}">
-                <a16:creationId xmlns:a16="http://schemas.microsoft.com/office/drawing/2014/main" id="{ADBB1894-E1A6-0D07-7927-6D634344EC7E}"/>
+                <a16:creationId xmlns:a16="http://schemas.microsoft.com/office/drawing/2014/main" id="{40E95F32-91C3-0293-8C3B-C9A0B6BDD5D5}"/>
               </a:ext>
             </a:extLst>
           </p:cNvPr>
@@ -4447,90 +5627,19 @@
             <p:ph idx="1"/>
           </p:nvPr>
         </p:nvSpPr>
-        <p:spPr>
-          <a:xfrm>
-            <a:off x="1451579" y="2015732"/>
-            <a:ext cx="9603275" cy="3981208"/>
-          </a:xfrm>
-        </p:spPr>
-        <p:txBody>
-          <a:bodyPr/>
-          <a:lstStyle/>
-          <a:p>
-            <a:r>
-              <a:rPr lang="en-US" dirty="0"/>
-              <a:t>This is very simple processing for text, for a simple model. </a:t>
-            </a:r>
-          </a:p>
-          <a:p>
-            <a:r>
-              <a:rPr lang="en-US" dirty="0"/>
-              <a:t>In larger models, the data preparation is different. </a:t>
-            </a:r>
-          </a:p>
-          <a:p>
-            <a:pPr lvl="1"/>
-            <a:r>
-              <a:rPr lang="en-US" dirty="0"/>
-              <a:t>Construction of the datasets is potentially a lot of work. </a:t>
-            </a:r>
-          </a:p>
-          <a:p>
-            <a:pPr lvl="1"/>
-            <a:r>
-              <a:rPr lang="en-US" dirty="0"/>
-              <a:t>Specific applications like chatbots may need to restructure data into prompt-response. </a:t>
-            </a:r>
-          </a:p>
-          <a:p>
-            <a:pPr lvl="1"/>
-            <a:r>
-              <a:rPr lang="en-US" dirty="0"/>
-              <a:t>Other models are commonly used to help process the massive amount of data. </a:t>
-            </a:r>
-          </a:p>
-          <a:p>
-            <a:pPr lvl="1"/>
-            <a:r>
-              <a:rPr lang="en-US" dirty="0"/>
-              <a:t>The dataset is massive, and may only have one or two epochs. </a:t>
-            </a:r>
-          </a:p>
-          <a:p>
-            <a:pPr lvl="1"/>
-            <a:r>
-              <a:rPr lang="en-US" dirty="0"/>
-              <a:t>Tokens are often sub-word length, as models need to handle suffix/prefix </a:t>
-            </a:r>
-            <a:r>
-              <a:rPr lang="en-US" dirty="0" err="1"/>
-              <a:t>etc</a:t>
-            </a:r>
-            <a:r>
-              <a:rPr lang="en-US" dirty="0"/>
-              <a:t>…</a:t>
-            </a:r>
-          </a:p>
-          <a:p>
-            <a:r>
-              <a:rPr lang="en-US" dirty="0"/>
-              <a:t>Large/smart models also have an assortment of things done to make them faster and better – reinforcement, specialized ‘sub-models’ (mixture of experts), </a:t>
-            </a:r>
-            <a:r>
-              <a:rPr lang="en-US" dirty="0" err="1"/>
-              <a:t>etc</a:t>
-            </a:r>
-            <a:r>
-              <a:rPr lang="en-US" dirty="0"/>
-              <a:t>…</a:t>
-            </a:r>
+        <p:spPr/>
+        <p:txBody>
+          <a:bodyPr/>
+          <a:lstStyle/>
+          <a:p>
+            <a:endParaRPr lang="en-US"/>
           </a:p>
         </p:txBody>
       </p:sp>
     </p:spTree>
     <p:extLst>
       <p:ext uri="{BB962C8B-B14F-4D97-AF65-F5344CB8AC3E}">
-        <p14:creationId xmlns:p14="http://schemas.microsoft.com/office/powerpoint/2010/main" val="1573726145"/>
+        <p14:creationId xmlns:p14="http://schemas.microsoft.com/office/powerpoint/2010/main" val="2966614165"/>
       </p:ext>
     </p:extLst>
   </p:cSld>
@@ -4540,7 +5649,7 @@
 </p:sld>
 </file>
 
-<file path=ppt/slides/slide15.xml><?xml version="1.0" encoding="utf-8"?>
+<file path=ppt/slides/slide23.xml><?xml version="1.0" encoding="utf-8"?>
 <p:sld xmlns:a="http://schemas.openxmlformats.org/drawingml/2006/main" xmlns:r="http://schemas.openxmlformats.org/officeDocument/2006/relationships" xmlns:p="http://schemas.openxmlformats.org/presentationml/2006/main">
   <p:cSld>
     <p:spTree>
@@ -4562,7 +5671,7 @@
           <p:cNvPr id="2" name="Title 1">
             <a:extLst>
               <a:ext uri="{FF2B5EF4-FFF2-40B4-BE49-F238E27FC236}">
-                <a16:creationId xmlns:a16="http://schemas.microsoft.com/office/drawing/2014/main" id="{C7CF3C70-5DBE-9649-91B6-454DF600C9C0}"/>
+                <a16:creationId xmlns:a16="http://schemas.microsoft.com/office/drawing/2014/main" id="{38C96FF3-69E9-A64D-99BE-2F7691D36E32}"/>
               </a:ext>
             </a:extLst>
           </p:cNvPr>
@@ -4580,7 +5689,7 @@
           <a:p>
             <a:r>
               <a:rPr lang="en-US" dirty="0"/>
-              <a:t>Training a Text Generator</a:t>
+              <a:t>Language Model Notes</a:t>
             </a:r>
           </a:p>
         </p:txBody>
@@ -4590,7 +5699,7 @@
           <p:cNvPr id="3" name="Content Placeholder 2">
             <a:extLst>
               <a:ext uri="{FF2B5EF4-FFF2-40B4-BE49-F238E27FC236}">
-                <a16:creationId xmlns:a16="http://schemas.microsoft.com/office/drawing/2014/main" id="{D58826EC-950E-8AC7-B809-D4A1C65525D6}"/>
+                <a16:creationId xmlns:a16="http://schemas.microsoft.com/office/drawing/2014/main" id="{ADBB1894-E1A6-0D07-7927-6D634344EC7E}"/>
               </a:ext>
             </a:extLst>
           </p:cNvPr>
@@ -4604,7 +5713,7 @@
         <p:spPr>
           <a:xfrm>
             <a:off x="1451579" y="2015732"/>
-            <a:ext cx="9603275" cy="4037749"/>
+            <a:ext cx="9603275" cy="3981208"/>
           </a:xfrm>
         </p:spPr>
         <p:txBody>
@@ -4613,45 +5722,70 @@
           <a:p>
             <a:r>
               <a:rPr lang="en-US" dirty="0"/>
-              <a:t>Training the model is the same, once the data is setup. </a:t>
-            </a:r>
-          </a:p>
-          <a:p>
-            <a:r>
-              <a:rPr lang="en-US" dirty="0"/>
-              <a:t>We need to ‘wrap’ some generation logic around it. </a:t>
-            </a:r>
-          </a:p>
-          <a:p>
-            <a:pPr lvl="1"/>
-            <a:r>
-              <a:rPr lang="en-US" dirty="0"/>
-              <a:t>Predict the next word, add it to the input, then that’s the input for predicting the next…</a:t>
-            </a:r>
-          </a:p>
-          <a:p>
-            <a:pPr lvl="1"/>
-            <a:r>
-              <a:rPr lang="en-US" dirty="0"/>
-              <a:t>The prediction is a token value, so we need to make it a word. </a:t>
-            </a:r>
-          </a:p>
-          <a:p>
-            <a:r>
-              <a:rPr lang="en-US" dirty="0"/>
-              <a:t>We can make a couple of simple functions to do this with our model. </a:t>
-            </a:r>
-          </a:p>
-          <a:p>
-            <a:r>
-              <a:rPr lang="en-US" dirty="0"/>
-              <a:t>When generating text, we need to provide some prompt that is the original X data. </a:t>
-            </a:r>
-          </a:p>
-          <a:p>
-            <a:r>
-              <a:rPr lang="en-US" dirty="0"/>
-              <a:t>We can tune the temperature…</a:t>
+              <a:t>This is very simple processing for text, for a simple model. </a:t>
+            </a:r>
+          </a:p>
+          <a:p>
+            <a:r>
+              <a:rPr lang="en-US" dirty="0"/>
+              <a:t>In larger models, the data preparation is (or can be) different. </a:t>
+            </a:r>
+          </a:p>
+          <a:p>
+            <a:pPr lvl="1"/>
+            <a:r>
+              <a:rPr lang="en-US" dirty="0"/>
+              <a:t>Construction of the datasets is potentially a lot of work. </a:t>
+            </a:r>
+          </a:p>
+          <a:p>
+            <a:pPr lvl="1"/>
+            <a:r>
+              <a:rPr lang="en-US" dirty="0"/>
+              <a:t>Specific applications like chatbots may need to restructure data into prompt-response. </a:t>
+            </a:r>
+          </a:p>
+          <a:p>
+            <a:pPr lvl="1"/>
+            <a:r>
+              <a:rPr lang="en-US" dirty="0"/>
+              <a:t>Other models are commonly used to help process the massive amount of data. </a:t>
+            </a:r>
+          </a:p>
+          <a:p>
+            <a:pPr lvl="1"/>
+            <a:r>
+              <a:rPr lang="en-US" dirty="0"/>
+              <a:t>The dataset is massive, and may only have one or two epochs. </a:t>
+            </a:r>
+          </a:p>
+          <a:p>
+            <a:pPr lvl="1"/>
+            <a:r>
+              <a:rPr lang="en-US" dirty="0"/>
+              <a:t>Tokens are often sub-word length, as models need to handle suffix/prefix </a:t>
+            </a:r>
+            <a:r>
+              <a:rPr lang="en-US" dirty="0" err="1"/>
+              <a:t>etc</a:t>
+            </a:r>
+            <a:r>
+              <a:rPr lang="en-US" dirty="0"/>
+              <a:t>…</a:t>
+            </a:r>
+          </a:p>
+          <a:p>
+            <a:r>
+              <a:rPr lang="en-US" dirty="0"/>
+              <a:t>Large/smart models also have an assortment of things done to make them faster and better – reinforcement, specialized ‘sub-models’ (mixture of experts), </a:t>
+            </a:r>
+            <a:r>
+              <a:rPr lang="en-US" dirty="0" err="1"/>
+              <a:t>etc</a:t>
+            </a:r>
+            <a:r>
+              <a:rPr lang="en-US" dirty="0"/>
+              <a:t>…</a:t>
             </a:r>
           </a:p>
         </p:txBody>
@@ -4659,7 +5793,7 @@
     </p:spTree>
     <p:extLst>
       <p:ext uri="{BB962C8B-B14F-4D97-AF65-F5344CB8AC3E}">
-        <p14:creationId xmlns:p14="http://schemas.microsoft.com/office/powerpoint/2010/main" val="3282648898"/>
+        <p14:creationId xmlns:p14="http://schemas.microsoft.com/office/powerpoint/2010/main" val="1573726145"/>
       </p:ext>
     </p:extLst>
   </p:cSld>
@@ -4669,7 +5803,7 @@
 </p:sld>
 </file>
 
-<file path=ppt/slides/slide16.xml><?xml version="1.0" encoding="utf-8"?>
+<file path=ppt/slides/slide24.xml><?xml version="1.0" encoding="utf-8"?>
 <p:sld xmlns:a="http://schemas.openxmlformats.org/drawingml/2006/main" xmlns:r="http://schemas.openxmlformats.org/officeDocument/2006/relationships" xmlns:p="http://schemas.openxmlformats.org/presentationml/2006/main">
   <p:cSld>
     <p:spTree>
@@ -4691,7 +5825,7 @@
           <p:cNvPr id="2" name="Title 1">
             <a:extLst>
               <a:ext uri="{FF2B5EF4-FFF2-40B4-BE49-F238E27FC236}">
-                <a16:creationId xmlns:a16="http://schemas.microsoft.com/office/drawing/2014/main" id="{43CAC816-5B34-ECC8-E609-514FF093C81A}"/>
+                <a16:creationId xmlns:a16="http://schemas.microsoft.com/office/drawing/2014/main" id="{C7CF3C70-5DBE-9649-91B6-454DF600C9C0}"/>
               </a:ext>
             </a:extLst>
           </p:cNvPr>
@@ -4709,7 +5843,7 @@
           <a:p>
             <a:r>
               <a:rPr lang="en-US" dirty="0"/>
-              <a:t>Temperature</a:t>
+              <a:t>Training a Text Generator</a:t>
             </a:r>
           </a:p>
         </p:txBody>
@@ -4719,7 +5853,7 @@
           <p:cNvPr id="3" name="Content Placeholder 2">
             <a:extLst>
               <a:ext uri="{FF2B5EF4-FFF2-40B4-BE49-F238E27FC236}">
-                <a16:creationId xmlns:a16="http://schemas.microsoft.com/office/drawing/2014/main" id="{D18E943C-280B-79C4-738F-4380B17D9467}"/>
+                <a16:creationId xmlns:a16="http://schemas.microsoft.com/office/drawing/2014/main" id="{D58826EC-950E-8AC7-B809-D4A1C65525D6}"/>
               </a:ext>
             </a:extLst>
           </p:cNvPr>
@@ -4733,7 +5867,7 @@
         <p:spPr>
           <a:xfrm>
             <a:off x="1451579" y="2015732"/>
-            <a:ext cx="9603275" cy="3981208"/>
+            <a:ext cx="9603275" cy="4037749"/>
           </a:xfrm>
         </p:spPr>
         <p:txBody>
@@ -4742,13 +5876,145 @@
           <a:p>
             <a:r>
               <a:rPr lang="en-US" dirty="0"/>
-              <a:t>The temperature injects randomness into the predictions. </a:t>
-            </a:r>
-          </a:p>
-          <a:p>
-            <a:r>
-              <a:rPr lang="en-US" dirty="0"/>
-              <a:t>Models always try to predict the correct answer, if possible. </a:t>
+              <a:t>Training the model is the same, once the data is setup. </a:t>
+            </a:r>
+          </a:p>
+          <a:p>
+            <a:r>
+              <a:rPr lang="en-US" dirty="0"/>
+              <a:t>To use it to chat,  we need to ‘wrap’ some generation logic around it. </a:t>
+            </a:r>
+          </a:p>
+          <a:p>
+            <a:pPr lvl="1"/>
+            <a:r>
+              <a:rPr lang="en-US" dirty="0"/>
+              <a:t>Predict the next word, add it to the input, then that’s the input for predicting the next…</a:t>
+            </a:r>
+          </a:p>
+          <a:p>
+            <a:pPr lvl="1"/>
+            <a:r>
+              <a:rPr lang="en-US" dirty="0"/>
+              <a:t>Recursive predictions from time series things. </a:t>
+            </a:r>
+          </a:p>
+          <a:p>
+            <a:pPr lvl="1"/>
+            <a:r>
+              <a:rPr lang="en-US" dirty="0"/>
+              <a:t>The prediction is a token value, so we need to make it a word. </a:t>
+            </a:r>
+          </a:p>
+          <a:p>
+            <a:r>
+              <a:rPr lang="en-US" dirty="0"/>
+              <a:t>We can make a couple of simple functions to do this with our model. </a:t>
+            </a:r>
+          </a:p>
+          <a:p>
+            <a:r>
+              <a:rPr lang="en-US" dirty="0"/>
+              <a:t>When generating text, we need to provide some prompt that is the original X data. </a:t>
+            </a:r>
+          </a:p>
+          <a:p>
+            <a:r>
+              <a:rPr lang="en-US" dirty="0"/>
+              <a:t>How does the model ‘sound’? We can tune the temperature. </a:t>
+            </a:r>
+          </a:p>
+        </p:txBody>
+      </p:sp>
+    </p:spTree>
+    <p:extLst>
+      <p:ext uri="{BB962C8B-B14F-4D97-AF65-F5344CB8AC3E}">
+        <p14:creationId xmlns:p14="http://schemas.microsoft.com/office/powerpoint/2010/main" val="3282648898"/>
+      </p:ext>
+    </p:extLst>
+  </p:cSld>
+  <p:clrMapOvr>
+    <a:masterClrMapping/>
+  </p:clrMapOvr>
+</p:sld>
+</file>
+
+<file path=ppt/slides/slide25.xml><?xml version="1.0" encoding="utf-8"?>
+<p:sld xmlns:a="http://schemas.openxmlformats.org/drawingml/2006/main" xmlns:r="http://schemas.openxmlformats.org/officeDocument/2006/relationships" xmlns:p="http://schemas.openxmlformats.org/presentationml/2006/main">
+  <p:cSld>
+    <p:spTree>
+      <p:nvGrpSpPr>
+        <p:cNvPr id="1" name=""/>
+        <p:cNvGrpSpPr/>
+        <p:nvPr/>
+      </p:nvGrpSpPr>
+      <p:grpSpPr>
+        <a:xfrm>
+          <a:off x="0" y="0"/>
+          <a:ext cx="0" cy="0"/>
+          <a:chOff x="0" y="0"/>
+          <a:chExt cx="0" cy="0"/>
+        </a:xfrm>
+      </p:grpSpPr>
+      <p:sp>
+        <p:nvSpPr>
+          <p:cNvPr id="2" name="Title 1">
+            <a:extLst>
+              <a:ext uri="{FF2B5EF4-FFF2-40B4-BE49-F238E27FC236}">
+                <a16:creationId xmlns:a16="http://schemas.microsoft.com/office/drawing/2014/main" id="{43CAC816-5B34-ECC8-E609-514FF093C81A}"/>
+              </a:ext>
+            </a:extLst>
+          </p:cNvPr>
+          <p:cNvSpPr>
+            <a:spLocks noGrp="1"/>
+          </p:cNvSpPr>
+          <p:nvPr>
+            <p:ph type="title"/>
+          </p:nvPr>
+        </p:nvSpPr>
+        <p:spPr/>
+        <p:txBody>
+          <a:bodyPr/>
+          <a:lstStyle/>
+          <a:p>
+            <a:r>
+              <a:rPr lang="en-US" dirty="0"/>
+              <a:t>Temperature</a:t>
+            </a:r>
+          </a:p>
+        </p:txBody>
+      </p:sp>
+      <p:sp>
+        <p:nvSpPr>
+          <p:cNvPr id="3" name="Content Placeholder 2">
+            <a:extLst>
+              <a:ext uri="{FF2B5EF4-FFF2-40B4-BE49-F238E27FC236}">
+                <a16:creationId xmlns:a16="http://schemas.microsoft.com/office/drawing/2014/main" id="{D18E943C-280B-79C4-738F-4380B17D9467}"/>
+              </a:ext>
+            </a:extLst>
+          </p:cNvPr>
+          <p:cNvSpPr>
+            <a:spLocks noGrp="1"/>
+          </p:cNvSpPr>
+          <p:nvPr>
+            <p:ph idx="1"/>
+          </p:nvPr>
+        </p:nvSpPr>
+        <p:spPr>
+          <a:xfrm>
+            <a:off x="1451580" y="1853754"/>
+            <a:ext cx="9859888" cy="4199727"/>
+          </a:xfrm>
+        </p:spPr>
+        <p:txBody>
+          <a:bodyPr>
+            <a:normAutofit/>
+          </a:bodyPr>
+          <a:lstStyle/>
+          <a:p>
+            <a:r>
+              <a:rPr lang="en-US" dirty="0"/>
+              <a:t>The model will normally select the most likely token as a prediction. </a:t>
             </a:r>
           </a:p>
           <a:p>
@@ -4762,7 +6028,7 @@
             <a:pPr lvl="1"/>
             <a:r>
               <a:rPr lang="en-US" dirty="0"/>
-              <a:t>A novelist isn’t trying to always choose the optimum word, or it would get repetitive. </a:t>
+              <a:t>A novelist isn’t trying to always choose the optimum/most likely word... </a:t>
             </a:r>
           </a:p>
           <a:p>
@@ -4783,6 +6049,12 @@
             <a:r>
               <a:rPr lang="en-US" dirty="0"/>
               <a:t>The ‘correct’ next word is most likely, but we’ll vary our selection of similar words. </a:t>
+            </a:r>
+          </a:p>
+          <a:p>
+            <a:r>
+              <a:rPr lang="en-US" dirty="0"/>
+              <a:t>With large/complex models, this allows for synonyms or different structure to be used. </a:t>
             </a:r>
           </a:p>
           <a:p>
@@ -4853,7 +6125,349 @@
 </p:sld>
 </file>
 
-<file path=ppt/slides/slide17.xml><?xml version="1.0" encoding="utf-8"?>
+<file path=ppt/slides/slide26.xml><?xml version="1.0" encoding="utf-8"?>
+<p:sld xmlns:a="http://schemas.openxmlformats.org/drawingml/2006/main" xmlns:r="http://schemas.openxmlformats.org/officeDocument/2006/relationships" xmlns:p="http://schemas.openxmlformats.org/presentationml/2006/main">
+  <p:cSld>
+    <p:spTree>
+      <p:nvGrpSpPr>
+        <p:cNvPr id="1" name=""/>
+        <p:cNvGrpSpPr/>
+        <p:nvPr/>
+      </p:nvGrpSpPr>
+      <p:grpSpPr>
+        <a:xfrm>
+          <a:off x="0" y="0"/>
+          <a:ext cx="0" cy="0"/>
+          <a:chOff x="0" y="0"/>
+          <a:chExt cx="0" cy="0"/>
+        </a:xfrm>
+      </p:grpSpPr>
+      <p:sp>
+        <p:nvSpPr>
+          <p:cNvPr id="2" name="Title 1">
+            <a:extLst>
+              <a:ext uri="{FF2B5EF4-FFF2-40B4-BE49-F238E27FC236}">
+                <a16:creationId xmlns:a16="http://schemas.microsoft.com/office/drawing/2014/main" id="{8AF40677-BB05-DE6A-DC02-D6C5A7A7F3B8}"/>
+              </a:ext>
+            </a:extLst>
+          </p:cNvPr>
+          <p:cNvSpPr>
+            <a:spLocks noGrp="1"/>
+          </p:cNvSpPr>
+          <p:nvPr>
+            <p:ph type="title"/>
+          </p:nvPr>
+        </p:nvSpPr>
+        <p:spPr/>
+        <p:txBody>
+          <a:bodyPr/>
+          <a:lstStyle/>
+          <a:p>
+            <a:r>
+              <a:rPr lang="en-US" dirty="0"/>
+              <a:t>Temperature introduces Randomness</a:t>
+            </a:r>
+          </a:p>
+        </p:txBody>
+      </p:sp>
+      <p:sp>
+        <p:nvSpPr>
+          <p:cNvPr id="3" name="Content Placeholder 2">
+            <a:extLst>
+              <a:ext uri="{FF2B5EF4-FFF2-40B4-BE49-F238E27FC236}">
+                <a16:creationId xmlns:a16="http://schemas.microsoft.com/office/drawing/2014/main" id="{636ABB31-D266-D539-94A4-EAA3F13158D9}"/>
+              </a:ext>
+            </a:extLst>
+          </p:cNvPr>
+          <p:cNvSpPr>
+            <a:spLocks noGrp="1"/>
+          </p:cNvSpPr>
+          <p:nvPr>
+            <p:ph idx="1"/>
+          </p:nvPr>
+        </p:nvSpPr>
+        <p:spPr/>
+        <p:txBody>
+          <a:bodyPr/>
+          <a:lstStyle/>
+          <a:p>
+            <a:endParaRPr lang="en-US"/>
+          </a:p>
+        </p:txBody>
+      </p:sp>
+      <p:pic>
+        <p:nvPicPr>
+          <p:cNvPr id="2050" name="Picture 2" descr="Demystifying the Temperature Parameter: A Visual Guide to Understanding its  Role in Large Language Models | by Mastering LLM (Large Language Model) |  Medium">
+            <a:extLst>
+              <a:ext uri="{FF2B5EF4-FFF2-40B4-BE49-F238E27FC236}">
+                <a16:creationId xmlns:a16="http://schemas.microsoft.com/office/drawing/2014/main" id="{7EC4B624-1AF0-0503-8264-E55B71C6913A}"/>
+              </a:ext>
+            </a:extLst>
+          </p:cNvPr>
+          <p:cNvPicPr>
+            <a:picLocks noChangeAspect="1" noChangeArrowheads="1"/>
+          </p:cNvPicPr>
+          <p:nvPr/>
+        </p:nvPicPr>
+        <p:blipFill rotWithShape="1">
+          <a:blip r:embed="rId2">
+            <a:extLst>
+              <a:ext uri="{28A0092B-C50C-407E-A947-70E740481C1C}">
+                <a14:useLocalDpi xmlns:a14="http://schemas.microsoft.com/office/drawing/2010/main" val="0"/>
+              </a:ext>
+            </a:extLst>
+          </a:blip>
+          <a:srcRect r="32037"/>
+          <a:stretch>
+            <a:fillRect/>
+          </a:stretch>
+        </p:blipFill>
+        <p:spPr bwMode="auto">
+          <a:xfrm>
+            <a:off x="45156" y="1884798"/>
+            <a:ext cx="5655733" cy="4681005"/>
+          </a:xfrm>
+          <a:prstGeom prst="rect">
+            <a:avLst/>
+          </a:prstGeom>
+          <a:noFill/>
+          <a:extLst>
+            <a:ext uri="{909E8E84-426E-40DD-AFC4-6F175D3DCCD1}">
+              <a14:hiddenFill xmlns:a14="http://schemas.microsoft.com/office/drawing/2010/main">
+                <a:solidFill>
+                  <a:srgbClr val="FFFFFF"/>
+                </a:solidFill>
+              </a14:hiddenFill>
+            </a:ext>
+          </a:extLst>
+        </p:spPr>
+      </p:pic>
+      <p:pic>
+        <p:nvPicPr>
+          <p:cNvPr id="2054" name="Picture 6" descr="Softmax Temperature. Temperature is a hyperparameter of… | by Harshit  Sharma | Medium">
+            <a:extLst>
+              <a:ext uri="{FF2B5EF4-FFF2-40B4-BE49-F238E27FC236}">
+                <a16:creationId xmlns:a16="http://schemas.microsoft.com/office/drawing/2014/main" id="{00D6B2D1-CE8D-2C81-5611-184BD83E3B7A}"/>
+              </a:ext>
+            </a:extLst>
+          </p:cNvPr>
+          <p:cNvPicPr>
+            <a:picLocks noChangeAspect="1" noChangeArrowheads="1"/>
+          </p:cNvPicPr>
+          <p:nvPr/>
+        </p:nvPicPr>
+        <p:blipFill rotWithShape="1">
+          <a:blip r:embed="rId3">
+            <a:extLst>
+              <a:ext uri="{28A0092B-C50C-407E-A947-70E740481C1C}">
+                <a14:useLocalDpi xmlns:a14="http://schemas.microsoft.com/office/drawing/2010/main" val="0"/>
+              </a:ext>
+            </a:extLst>
+          </a:blip>
+          <a:srcRect l="5384" t="7737" r="5468" b="6831"/>
+          <a:stretch>
+            <a:fillRect/>
+          </a:stretch>
+        </p:blipFill>
+        <p:spPr bwMode="auto">
+          <a:xfrm>
+            <a:off x="5881511" y="2035276"/>
+            <a:ext cx="6265333" cy="3593047"/>
+          </a:xfrm>
+          <a:prstGeom prst="rect">
+            <a:avLst/>
+          </a:prstGeom>
+          <a:noFill/>
+          <a:extLst>
+            <a:ext uri="{909E8E84-426E-40DD-AFC4-6F175D3DCCD1}">
+              <a14:hiddenFill xmlns:a14="http://schemas.microsoft.com/office/drawing/2010/main">
+                <a:solidFill>
+                  <a:srgbClr val="FFFFFF"/>
+                </a:solidFill>
+              </a14:hiddenFill>
+            </a:ext>
+          </a:extLst>
+        </p:spPr>
+      </p:pic>
+    </p:spTree>
+    <p:extLst>
+      <p:ext uri="{BB962C8B-B14F-4D97-AF65-F5344CB8AC3E}">
+        <p14:creationId xmlns:p14="http://schemas.microsoft.com/office/powerpoint/2010/main" val="2328675659"/>
+      </p:ext>
+    </p:extLst>
+  </p:cSld>
+  <p:clrMapOvr>
+    <a:masterClrMapping/>
+  </p:clrMapOvr>
+</p:sld>
+</file>
+
+<file path=ppt/slides/slide27.xml><?xml version="1.0" encoding="utf-8"?>
+<p:sld xmlns:a="http://schemas.openxmlformats.org/drawingml/2006/main" xmlns:r="http://schemas.openxmlformats.org/officeDocument/2006/relationships" xmlns:p="http://schemas.openxmlformats.org/presentationml/2006/main">
+  <p:cSld>
+    <p:spTree>
+      <p:nvGrpSpPr>
+        <p:cNvPr id="1" name=""/>
+        <p:cNvGrpSpPr/>
+        <p:nvPr/>
+      </p:nvGrpSpPr>
+      <p:grpSpPr>
+        <a:xfrm>
+          <a:off x="0" y="0"/>
+          <a:ext cx="0" cy="0"/>
+          <a:chOff x="0" y="0"/>
+          <a:chExt cx="0" cy="0"/>
+        </a:xfrm>
+      </p:grpSpPr>
+      <p:sp>
+        <p:nvSpPr>
+          <p:cNvPr id="2" name="Title 1">
+            <a:extLst>
+              <a:ext uri="{FF2B5EF4-FFF2-40B4-BE49-F238E27FC236}">
+                <a16:creationId xmlns:a16="http://schemas.microsoft.com/office/drawing/2014/main" id="{6F7FE5DE-6469-3E69-1D8D-03445267AF64}"/>
+              </a:ext>
+            </a:extLst>
+          </p:cNvPr>
+          <p:cNvSpPr>
+            <a:spLocks noGrp="1"/>
+          </p:cNvSpPr>
+          <p:nvPr>
+            <p:ph type="title"/>
+          </p:nvPr>
+        </p:nvSpPr>
+        <p:spPr/>
+        <p:txBody>
+          <a:bodyPr/>
+          <a:lstStyle/>
+          <a:p>
+            <a:r>
+              <a:rPr lang="en-US" dirty="0"/>
+              <a:t>Tune that Temp!</a:t>
+            </a:r>
+          </a:p>
+        </p:txBody>
+      </p:sp>
+      <p:sp>
+        <p:nvSpPr>
+          <p:cNvPr id="3" name="Content Placeholder 2">
+            <a:extLst>
+              <a:ext uri="{FF2B5EF4-FFF2-40B4-BE49-F238E27FC236}">
+                <a16:creationId xmlns:a16="http://schemas.microsoft.com/office/drawing/2014/main" id="{ACFD3F9F-E773-5F01-DD16-E50B17808D9D}"/>
+              </a:ext>
+            </a:extLst>
+          </p:cNvPr>
+          <p:cNvSpPr>
+            <a:spLocks noGrp="1"/>
+          </p:cNvSpPr>
+          <p:nvPr>
+            <p:ph idx="1"/>
+          </p:nvPr>
+        </p:nvSpPr>
+        <p:spPr>
+          <a:xfrm>
+            <a:off x="1" y="2015732"/>
+            <a:ext cx="4163626" cy="4037749"/>
+          </a:xfrm>
+        </p:spPr>
+        <p:txBody>
+          <a:bodyPr/>
+          <a:lstStyle/>
+          <a:p>
+            <a:r>
+              <a:rPr lang="en-US" dirty="0"/>
+              <a:t>Temperature can also be used to tune a model for different uses.</a:t>
+            </a:r>
+          </a:p>
+          <a:p>
+            <a:pPr lvl="1"/>
+            <a:r>
+              <a:rPr lang="en-US" dirty="0"/>
+              <a:t>Variations from “most correct” make different amounts of sense.  </a:t>
+            </a:r>
+          </a:p>
+          <a:p>
+            <a:r>
+              <a:rPr lang="en-US" dirty="0"/>
+              <a:t>There are other sampling methods as well. </a:t>
+            </a:r>
+          </a:p>
+          <a:p>
+            <a:pPr lvl="1"/>
+            <a:r>
+              <a:rPr lang="en-US" dirty="0"/>
+              <a:t>Top-k: pick most likely, then select. </a:t>
+            </a:r>
+          </a:p>
+          <a:p>
+            <a:pPr lvl="1"/>
+            <a:r>
+              <a:rPr lang="en-US" dirty="0"/>
+              <a:t>Could be anything. </a:t>
+            </a:r>
+          </a:p>
+        </p:txBody>
+      </p:sp>
+      <p:pic>
+        <p:nvPicPr>
+          <p:cNvPr id="3074" name="Picture 2" descr="Decoding Temperature in Large Language Models: Fine-Tuning AI Responses |  by Dhiraj K | Artificial Intelligence in Plain English">
+            <a:extLst>
+              <a:ext uri="{FF2B5EF4-FFF2-40B4-BE49-F238E27FC236}">
+                <a16:creationId xmlns:a16="http://schemas.microsoft.com/office/drawing/2014/main" id="{2DDC1DB8-1318-5322-269B-16C75E7FC06E}"/>
+              </a:ext>
+            </a:extLst>
+          </p:cNvPr>
+          <p:cNvPicPr>
+            <a:picLocks noChangeAspect="1" noChangeArrowheads="1"/>
+          </p:cNvPicPr>
+          <p:nvPr/>
+        </p:nvPicPr>
+        <p:blipFill>
+          <a:blip r:embed="rId2">
+            <a:extLst>
+              <a:ext uri="{28A0092B-C50C-407E-A947-70E740481C1C}">
+                <a14:useLocalDpi xmlns:a14="http://schemas.microsoft.com/office/drawing/2010/main" val="0"/>
+              </a:ext>
+            </a:extLst>
+          </a:blip>
+          <a:srcRect/>
+          <a:stretch>
+            <a:fillRect/>
+          </a:stretch>
+        </p:blipFill>
+        <p:spPr bwMode="auto">
+          <a:xfrm>
+            <a:off x="4163626" y="2015732"/>
+            <a:ext cx="8028373" cy="3891996"/>
+          </a:xfrm>
+          <a:prstGeom prst="rect">
+            <a:avLst/>
+          </a:prstGeom>
+          <a:noFill/>
+          <a:extLst>
+            <a:ext uri="{909E8E84-426E-40DD-AFC4-6F175D3DCCD1}">
+              <a14:hiddenFill xmlns:a14="http://schemas.microsoft.com/office/drawing/2010/main">
+                <a:solidFill>
+                  <a:srgbClr val="FFFFFF"/>
+                </a:solidFill>
+              </a14:hiddenFill>
+            </a:ext>
+          </a:extLst>
+        </p:spPr>
+      </p:pic>
+    </p:spTree>
+    <p:extLst>
+      <p:ext uri="{BB962C8B-B14F-4D97-AF65-F5344CB8AC3E}">
+        <p14:creationId xmlns:p14="http://schemas.microsoft.com/office/powerpoint/2010/main" val="213208068"/>
+      </p:ext>
+    </p:extLst>
+  </p:cSld>
+  <p:clrMapOvr>
+    <a:masterClrMapping/>
+  </p:clrMapOvr>
+</p:sld>
+</file>
+
+<file path=ppt/slides/slide28.xml><?xml version="1.0" encoding="utf-8"?>
 <p:sld xmlns:a="http://schemas.openxmlformats.org/drawingml/2006/main" xmlns:r="http://schemas.openxmlformats.org/officeDocument/2006/relationships" xmlns:p="http://schemas.openxmlformats.org/presentationml/2006/main" show="0">
   <p:cSld>
     <p:spTree>
@@ -4939,8 +6553,8 @@
 </p:sld>
 </file>
 
-<file path=ppt/slides/slide18.xml><?xml version="1.0" encoding="utf-8"?>
-<p:sld xmlns:a="http://schemas.openxmlformats.org/drawingml/2006/main" xmlns:r="http://schemas.openxmlformats.org/officeDocument/2006/relationships" xmlns:p="http://schemas.openxmlformats.org/presentationml/2006/main">
+<file path=ppt/slides/slide29.xml><?xml version="1.0" encoding="utf-8"?>
+<p:sld xmlns:a="http://schemas.openxmlformats.org/drawingml/2006/main" xmlns:r="http://schemas.openxmlformats.org/officeDocument/2006/relationships" xmlns:p="http://schemas.openxmlformats.org/presentationml/2006/main" show="0">
   <p:cSld>
     <p:spTree>
       <p:nvGrpSpPr>
@@ -5174,7 +6788,7 @@
 </p:sld>
 </file>
 
-<file path=ppt/slides/slide19.xml><?xml version="1.0" encoding="utf-8"?>
+<file path=ppt/slides/slide3.xml><?xml version="1.0" encoding="utf-8"?>
 <p:sld xmlns:a="http://schemas.openxmlformats.org/drawingml/2006/main" xmlns:r="http://schemas.openxmlformats.org/officeDocument/2006/relationships" xmlns:p="http://schemas.openxmlformats.org/presentationml/2006/main">
   <p:cSld>
     <p:spTree>
@@ -5196,6 +6810,89 @@
           <p:cNvPr id="2" name="Title 1">
             <a:extLst>
               <a:ext uri="{FF2B5EF4-FFF2-40B4-BE49-F238E27FC236}">
+                <a16:creationId xmlns:a16="http://schemas.microsoft.com/office/drawing/2014/main" id="{CDF519A7-928A-8E8E-35F1-C85EE3203ABA}"/>
+              </a:ext>
+            </a:extLst>
+          </p:cNvPr>
+          <p:cNvSpPr>
+            <a:spLocks noGrp="1"/>
+          </p:cNvSpPr>
+          <p:nvPr>
+            <p:ph type="ctrTitle"/>
+          </p:nvPr>
+        </p:nvSpPr>
+        <p:spPr/>
+        <p:txBody>
+          <a:bodyPr/>
+          <a:lstStyle/>
+          <a:p>
+            <a:r>
+              <a:rPr lang="en-US" dirty="0"/>
+              <a:t>Text Generation</a:t>
+            </a:r>
+          </a:p>
+        </p:txBody>
+      </p:sp>
+      <p:sp>
+        <p:nvSpPr>
+          <p:cNvPr id="3" name="Subtitle 2">
+            <a:extLst>
+              <a:ext uri="{FF2B5EF4-FFF2-40B4-BE49-F238E27FC236}">
+                <a16:creationId xmlns:a16="http://schemas.microsoft.com/office/drawing/2014/main" id="{365B798F-E73B-B6DD-4907-5069BB3FDB16}"/>
+              </a:ext>
+            </a:extLst>
+          </p:cNvPr>
+          <p:cNvSpPr>
+            <a:spLocks noGrp="1"/>
+          </p:cNvSpPr>
+          <p:nvPr>
+            <p:ph type="subTitle" idx="1"/>
+          </p:nvPr>
+        </p:nvSpPr>
+        <p:spPr/>
+        <p:txBody>
+          <a:bodyPr/>
+          <a:lstStyle/>
+          <a:p>
+            <a:endParaRPr lang="en-US"/>
+          </a:p>
+        </p:txBody>
+      </p:sp>
+    </p:spTree>
+    <p:extLst>
+      <p:ext uri="{BB962C8B-B14F-4D97-AF65-F5344CB8AC3E}">
+        <p14:creationId xmlns:p14="http://schemas.microsoft.com/office/powerpoint/2010/main" val="838896935"/>
+      </p:ext>
+    </p:extLst>
+  </p:cSld>
+  <p:clrMapOvr>
+    <a:masterClrMapping/>
+  </p:clrMapOvr>
+</p:sld>
+</file>
+
+<file path=ppt/slides/slide30.xml><?xml version="1.0" encoding="utf-8"?>
+<p:sld xmlns:a="http://schemas.openxmlformats.org/drawingml/2006/main" xmlns:r="http://schemas.openxmlformats.org/officeDocument/2006/relationships" xmlns:p="http://schemas.openxmlformats.org/presentationml/2006/main">
+  <p:cSld>
+    <p:spTree>
+      <p:nvGrpSpPr>
+        <p:cNvPr id="1" name=""/>
+        <p:cNvGrpSpPr/>
+        <p:nvPr/>
+      </p:nvGrpSpPr>
+      <p:grpSpPr>
+        <a:xfrm>
+          <a:off x="0" y="0"/>
+          <a:ext cx="0" cy="0"/>
+          <a:chOff x="0" y="0"/>
+          <a:chExt cx="0" cy="0"/>
+        </a:xfrm>
+      </p:grpSpPr>
+      <p:sp>
+        <p:nvSpPr>
+          <p:cNvPr id="2" name="Title 1">
+            <a:extLst>
+              <a:ext uri="{FF2B5EF4-FFF2-40B4-BE49-F238E27FC236}">
                 <a16:creationId xmlns:a16="http://schemas.microsoft.com/office/drawing/2014/main" id="{0FE8E366-142C-816C-E97D-53C4F169D490}"/>
               </a:ext>
             </a:extLst>
@@ -5237,8 +6934,8 @@
         </p:nvSpPr>
         <p:spPr>
           <a:xfrm>
-            <a:off x="4427620" y="1853754"/>
-            <a:ext cx="7764379" cy="4199727"/>
+            <a:off x="4252404" y="1853754"/>
+            <a:ext cx="7939595" cy="4199727"/>
           </a:xfrm>
         </p:spPr>
         <p:txBody>
@@ -5255,7 +6952,7 @@
           <a:p>
             <a:r>
               <a:rPr lang="en-US" dirty="0"/>
-              <a:t>Good text generation is hard, and we aren’t making a good attempt. </a:t>
+              <a:t>Good text generation is hard, and we aren’t making a great attempt. </a:t>
             </a:r>
           </a:p>
           <a:p>
@@ -5269,14 +6966,14 @@
             <a:pPr lvl="1"/>
             <a:r>
               <a:rPr lang="en-US" dirty="0"/>
-              <a:t>That requires massive datasets. </a:t>
-            </a:r>
-          </a:p>
-          <a:p>
-            <a:pPr lvl="1"/>
-            <a:r>
-              <a:rPr lang="en-US" dirty="0"/>
-              <a:t>Those mean it takes ages to train one – we aren’t even at a fraction of .001% of that. </a:t>
+              <a:t>That requires massive datasets and time.  </a:t>
+            </a:r>
+          </a:p>
+          <a:p>
+            <a:pPr lvl="1"/>
+            <a:r>
+              <a:rPr lang="en-US" dirty="0"/>
+              <a:t>Those mean it takes ages to train one – we aren’t even at a fraction of that. </a:t>
             </a:r>
           </a:p>
           <a:p>
@@ -5304,7 +7001,14 @@
             <a:pPr lvl="1"/>
             <a:r>
               <a:rPr lang="en-US" dirty="0"/>
-              <a:t>The model can learn its way out of this, but may take time…</a:t>
+              <a:t>The model can (maybe) learn its way out of this, but may take time…</a:t>
+            </a:r>
+          </a:p>
+          <a:p>
+            <a:pPr lvl="2"/>
+            <a:r>
+              <a:rPr lang="en-US" dirty="0"/>
+              <a:t>The temperature helps with randomness here. </a:t>
             </a:r>
           </a:p>
         </p:txBody>
@@ -5352,7 +7056,7 @@
 </p:sld>
 </file>
 
-<file path=ppt/slides/slide2.xml><?xml version="1.0" encoding="utf-8"?>
+<file path=ppt/slides/slide31.xml><?xml version="1.0" encoding="utf-8"?>
 <p:sld xmlns:a="http://schemas.openxmlformats.org/drawingml/2006/main" xmlns:r="http://schemas.openxmlformats.org/officeDocument/2006/relationships" xmlns:p="http://schemas.openxmlformats.org/presentationml/2006/main">
   <p:cSld>
     <p:spTree>
@@ -5374,15 +7078,15 @@
           <p:cNvPr id="2" name="Title 1">
             <a:extLst>
               <a:ext uri="{FF2B5EF4-FFF2-40B4-BE49-F238E27FC236}">
-                <a16:creationId xmlns:a16="http://schemas.microsoft.com/office/drawing/2014/main" id="{CDF519A7-928A-8E8E-35F1-C85EE3203ABA}"/>
-              </a:ext>
-            </a:extLst>
-          </p:cNvPr>
-          <p:cNvSpPr>
-            <a:spLocks noGrp="1"/>
-          </p:cNvSpPr>
-          <p:nvPr>
-            <p:ph type="ctrTitle"/>
+                <a16:creationId xmlns:a16="http://schemas.microsoft.com/office/drawing/2014/main" id="{31CC06F6-13DA-E5B3-EC4D-48B170E7D19D}"/>
+              </a:ext>
+            </a:extLst>
+          </p:cNvPr>
+          <p:cNvSpPr>
+            <a:spLocks noGrp="1"/>
+          </p:cNvSpPr>
+          <p:nvPr>
+            <p:ph type="title"/>
           </p:nvPr>
         </p:nvSpPr>
         <p:spPr/>
@@ -5391,41 +7095,132 @@
           <a:lstStyle/>
           <a:p>
             <a:r>
-              <a:rPr lang="en-US" dirty="0"/>
-              <a:t>Text Generation</a:t>
-            </a:r>
-          </a:p>
-        </p:txBody>
-      </p:sp>
-      <p:sp>
-        <p:nvSpPr>
-          <p:cNvPr id="3" name="Subtitle 2">
-            <a:extLst>
-              <a:ext uri="{FF2B5EF4-FFF2-40B4-BE49-F238E27FC236}">
-                <a16:creationId xmlns:a16="http://schemas.microsoft.com/office/drawing/2014/main" id="{365B798F-E73B-B6DD-4907-5069BB3FDB16}"/>
-              </a:ext>
-            </a:extLst>
-          </p:cNvPr>
-          <p:cNvSpPr>
-            <a:spLocks noGrp="1"/>
-          </p:cNvSpPr>
-          <p:nvPr>
-            <p:ph type="subTitle" idx="1"/>
-          </p:nvPr>
-        </p:nvSpPr>
-        <p:spPr/>
-        <p:txBody>
-          <a:bodyPr/>
-          <a:lstStyle/>
-          <a:p>
-            <a:endParaRPr lang="en-US"/>
-          </a:p>
-        </p:txBody>
-      </p:sp>
+              <a:rPr lang="en-US" dirty="0" err="1"/>
+              <a:t>Chatbotification</a:t>
+            </a:r>
+            <a:endParaRPr lang="en-US" dirty="0"/>
+          </a:p>
+        </p:txBody>
+      </p:sp>
+      <p:sp>
+        <p:nvSpPr>
+          <p:cNvPr id="3" name="Content Placeholder 2">
+            <a:extLst>
+              <a:ext uri="{FF2B5EF4-FFF2-40B4-BE49-F238E27FC236}">
+                <a16:creationId xmlns:a16="http://schemas.microsoft.com/office/drawing/2014/main" id="{B8912CC1-C176-28F5-E7FD-8BE84DB134FE}"/>
+              </a:ext>
+            </a:extLst>
+          </p:cNvPr>
+          <p:cNvSpPr>
+            <a:spLocks noGrp="1"/>
+          </p:cNvSpPr>
+          <p:nvPr>
+            <p:ph idx="1"/>
+          </p:nvPr>
+        </p:nvSpPr>
+        <p:spPr>
+          <a:xfrm>
+            <a:off x="314433" y="1853755"/>
+            <a:ext cx="6098399" cy="4199726"/>
+          </a:xfrm>
+        </p:spPr>
+        <p:txBody>
+          <a:bodyPr/>
+          <a:lstStyle/>
+          <a:p>
+            <a:r>
+              <a:rPr lang="en-US" dirty="0"/>
+              <a:t>Our model is a text generator, but not usable for normal interactions yet. </a:t>
+            </a:r>
+          </a:p>
+          <a:p>
+            <a:r>
+              <a:rPr lang="en-US" dirty="0"/>
+              <a:t>Need to wrap model in interface. </a:t>
+            </a:r>
+          </a:p>
+          <a:p>
+            <a:r>
+              <a:rPr lang="en-US" dirty="0"/>
+              <a:t>This does that (a little more efficiently):</a:t>
+            </a:r>
+          </a:p>
+          <a:p>
+            <a:pPr lvl="1"/>
+            <a:r>
+              <a:rPr lang="en-US" dirty="0"/>
+              <a:t>Generate an output. </a:t>
+            </a:r>
+          </a:p>
+          <a:p>
+            <a:pPr lvl="1"/>
+            <a:r>
+              <a:rPr lang="en-US" dirty="0"/>
+              <a:t>Stack the next prediction on top. </a:t>
+            </a:r>
+          </a:p>
+          <a:p>
+            <a:pPr lvl="1"/>
+            <a:r>
+              <a:rPr lang="en-US" dirty="0"/>
+              <a:t>Generate a new prediction. </a:t>
+            </a:r>
+          </a:p>
+          <a:p>
+            <a:r>
+              <a:rPr lang="en-US" dirty="0"/>
+              <a:t>Send this a seed, get back a response. </a:t>
+            </a:r>
+          </a:p>
+          <a:p>
+            <a:pPr lvl="1"/>
+            <a:r>
+              <a:rPr lang="en-US" dirty="0"/>
+              <a:t>A chat “tool” would call this to </a:t>
+            </a:r>
+            <a:r>
+              <a:rPr lang="en-US"/>
+              <a:t>get responses. </a:t>
+            </a:r>
+            <a:endParaRPr lang="en-US" dirty="0"/>
+          </a:p>
+        </p:txBody>
+      </p:sp>
+      <p:pic>
+        <p:nvPicPr>
+          <p:cNvPr id="4" name="Picture 3">
+            <a:extLst>
+              <a:ext uri="{FF2B5EF4-FFF2-40B4-BE49-F238E27FC236}">
+                <a16:creationId xmlns:a16="http://schemas.microsoft.com/office/drawing/2014/main" id="{0D95FEB3-489B-9E0F-24FC-57A4FB1E230A}"/>
+              </a:ext>
+            </a:extLst>
+          </p:cNvPr>
+          <p:cNvPicPr>
+            <a:picLocks noChangeAspect="1"/>
+          </p:cNvPicPr>
+          <p:nvPr/>
+        </p:nvPicPr>
+        <p:blipFill>
+          <a:blip r:embed="rId2"/>
+          <a:srcRect r="25645"/>
+          <a:stretch>
+            <a:fillRect/>
+          </a:stretch>
+        </p:blipFill>
+        <p:spPr>
+          <a:xfrm>
+            <a:off x="6412832" y="1391655"/>
+            <a:ext cx="5779168" cy="4976507"/>
+          </a:xfrm>
+          <a:prstGeom prst="rect">
+            <a:avLst/>
+          </a:prstGeom>
+        </p:spPr>
+      </p:pic>
     </p:spTree>
     <p:extLst>
       <p:ext uri="{BB962C8B-B14F-4D97-AF65-F5344CB8AC3E}">
-        <p14:creationId xmlns:p14="http://schemas.microsoft.com/office/powerpoint/2010/main" val="838896935"/>
+        <p14:creationId xmlns:p14="http://schemas.microsoft.com/office/powerpoint/2010/main" val="3743112269"/>
       </p:ext>
     </p:extLst>
   </p:cSld>
@@ -5435,7 +7230,383 @@
 </p:sld>
 </file>
 
-<file path=ppt/slides/slide20.xml><?xml version="1.0" encoding="utf-8"?>
+<file path=ppt/slides/slide32.xml><?xml version="1.0" encoding="utf-8"?>
+<p:sld xmlns:a="http://schemas.openxmlformats.org/drawingml/2006/main" xmlns:r="http://schemas.openxmlformats.org/officeDocument/2006/relationships" xmlns:p="http://schemas.openxmlformats.org/presentationml/2006/main">
+  <p:cSld>
+    <p:spTree>
+      <p:nvGrpSpPr>
+        <p:cNvPr id="1" name=""/>
+        <p:cNvGrpSpPr/>
+        <p:nvPr/>
+      </p:nvGrpSpPr>
+      <p:grpSpPr>
+        <a:xfrm>
+          <a:off x="0" y="0"/>
+          <a:ext cx="0" cy="0"/>
+          <a:chOff x="0" y="0"/>
+          <a:chExt cx="0" cy="0"/>
+        </a:xfrm>
+      </p:grpSpPr>
+      <p:sp>
+        <p:nvSpPr>
+          <p:cNvPr id="2" name="Title 1">
+            <a:extLst>
+              <a:ext uri="{FF2B5EF4-FFF2-40B4-BE49-F238E27FC236}">
+                <a16:creationId xmlns:a16="http://schemas.microsoft.com/office/drawing/2014/main" id="{746BB99E-D4F3-C449-EB64-0BA8D6026718}"/>
+              </a:ext>
+            </a:extLst>
+          </p:cNvPr>
+          <p:cNvSpPr>
+            <a:spLocks noGrp="1"/>
+          </p:cNvSpPr>
+          <p:nvPr>
+            <p:ph type="title"/>
+          </p:nvPr>
+        </p:nvSpPr>
+        <p:spPr/>
+        <p:txBody>
+          <a:bodyPr/>
+          <a:lstStyle/>
+          <a:p>
+            <a:r>
+              <a:rPr lang="en-US" dirty="0"/>
+              <a:t>But I want to have a good Model!</a:t>
+            </a:r>
+          </a:p>
+        </p:txBody>
+      </p:sp>
+      <p:sp>
+        <p:nvSpPr>
+          <p:cNvPr id="3" name="Content Placeholder 2">
+            <a:extLst>
+              <a:ext uri="{FF2B5EF4-FFF2-40B4-BE49-F238E27FC236}">
+                <a16:creationId xmlns:a16="http://schemas.microsoft.com/office/drawing/2014/main" id="{D031F523-F576-5A35-58E9-EF36C104F1C6}"/>
+              </a:ext>
+            </a:extLst>
+          </p:cNvPr>
+          <p:cNvSpPr>
+            <a:spLocks noGrp="1"/>
+          </p:cNvSpPr>
+          <p:nvPr>
+            <p:ph idx="1"/>
+          </p:nvPr>
+        </p:nvSpPr>
+        <p:spPr>
+          <a:xfrm>
+            <a:off x="1451579" y="1853754"/>
+            <a:ext cx="9603275" cy="4284287"/>
+          </a:xfrm>
+        </p:spPr>
+        <p:txBody>
+          <a:bodyPr>
+            <a:normAutofit lnSpcReduction="10000"/>
+          </a:bodyPr>
+          <a:lstStyle/>
+          <a:p>
+            <a:r>
+              <a:rPr lang="en-US" dirty="0"/>
+              <a:t>Training a real LLM is an industrial scale effort, we really can’t do it. </a:t>
+            </a:r>
+          </a:p>
+          <a:p>
+            <a:pPr lvl="1"/>
+            <a:r>
+              <a:rPr lang="en-US" dirty="0"/>
+              <a:t>Language is complex, and models are massive.</a:t>
+            </a:r>
+          </a:p>
+          <a:p>
+            <a:pPr lvl="1"/>
+            <a:r>
+              <a:rPr lang="en-US" dirty="0"/>
+              <a:t>Really need to distribute it to many systems for large models.  </a:t>
+            </a:r>
+          </a:p>
+          <a:p>
+            <a:r>
+              <a:rPr lang="en-US" dirty="0"/>
+              <a:t>E.g. Facebook’s llama models. </a:t>
+            </a:r>
+          </a:p>
+          <a:p>
+            <a:pPr lvl="1"/>
+            <a:r>
+              <a:rPr lang="en-US" dirty="0"/>
+              <a:t>Gen 2 reportedly required nearly 2 million GPU hours. </a:t>
+            </a:r>
+          </a:p>
+          <a:p>
+            <a:pPr lvl="1"/>
+            <a:r>
+              <a:rPr lang="en-US" dirty="0"/>
+              <a:t>Gen 4 (current) has over 5x as many parameters to train. </a:t>
+            </a:r>
+          </a:p>
+          <a:p>
+            <a:r>
+              <a:rPr lang="en-US" dirty="0"/>
+              <a:t>Smaller shortcuts for speed can really add up here (optimizers, vectorizing code, moving calculations to/from GPU, mathematical shortcuts like matrix calculus for gradients…)</a:t>
+            </a:r>
+          </a:p>
+          <a:p>
+            <a:pPr lvl="1"/>
+            <a:r>
+              <a:rPr lang="en-US" dirty="0"/>
+              <a:t>Estimates of training data needs range between 10s and 1000s of tokens/param. </a:t>
+            </a:r>
+          </a:p>
+          <a:p>
+            <a:pPr lvl="1"/>
+            <a:r>
+              <a:rPr lang="en-US" dirty="0"/>
+              <a:t>Costs can run into hundreds of millions for large models. </a:t>
+            </a:r>
+          </a:p>
+          <a:p>
+            <a:pPr lvl="1"/>
+            <a:r>
+              <a:rPr lang="en-US" dirty="0"/>
+              <a:t>Some GPUs available on </a:t>
+            </a:r>
+            <a:r>
+              <a:rPr lang="en-US" dirty="0" err="1"/>
+              <a:t>colab</a:t>
+            </a:r>
+            <a:r>
+              <a:rPr lang="en-US" dirty="0"/>
+              <a:t> have 40 or 80gb of GPU ram, no consumer machine matches. </a:t>
+            </a:r>
+          </a:p>
+        </p:txBody>
+      </p:sp>
+    </p:spTree>
+    <p:extLst>
+      <p:ext uri="{BB962C8B-B14F-4D97-AF65-F5344CB8AC3E}">
+        <p14:creationId xmlns:p14="http://schemas.microsoft.com/office/powerpoint/2010/main" val="2588657917"/>
+      </p:ext>
+    </p:extLst>
+  </p:cSld>
+  <p:clrMapOvr>
+    <a:masterClrMapping/>
+  </p:clrMapOvr>
+</p:sld>
+</file>
+
+<file path=ppt/slides/slide33.xml><?xml version="1.0" encoding="utf-8"?>
+<p:sld xmlns:a="http://schemas.openxmlformats.org/drawingml/2006/main" xmlns:r="http://schemas.openxmlformats.org/officeDocument/2006/relationships" xmlns:p="http://schemas.openxmlformats.org/presentationml/2006/main">
+  <p:cSld>
+    <p:spTree>
+      <p:nvGrpSpPr>
+        <p:cNvPr id="1" name=""/>
+        <p:cNvGrpSpPr/>
+        <p:nvPr/>
+      </p:nvGrpSpPr>
+      <p:grpSpPr>
+        <a:xfrm>
+          <a:off x="0" y="0"/>
+          <a:ext cx="0" cy="0"/>
+          <a:chOff x="0" y="0"/>
+          <a:chExt cx="0" cy="0"/>
+        </a:xfrm>
+      </p:grpSpPr>
+      <p:sp>
+        <p:nvSpPr>
+          <p:cNvPr id="2" name="Title 1">
+            <a:extLst>
+              <a:ext uri="{FF2B5EF4-FFF2-40B4-BE49-F238E27FC236}">
+                <a16:creationId xmlns:a16="http://schemas.microsoft.com/office/drawing/2014/main" id="{0E27BA70-3830-8640-6775-B64235D84D22}"/>
+              </a:ext>
+            </a:extLst>
+          </p:cNvPr>
+          <p:cNvSpPr>
+            <a:spLocks noGrp="1"/>
+          </p:cNvSpPr>
+          <p:nvPr>
+            <p:ph type="title"/>
+          </p:nvPr>
+        </p:nvSpPr>
+        <p:spPr/>
+        <p:txBody>
+          <a:bodyPr/>
+          <a:lstStyle/>
+          <a:p>
+            <a:r>
+              <a:rPr lang="en-US" dirty="0"/>
+              <a:t>Save that Weight</a:t>
+            </a:r>
+          </a:p>
+        </p:txBody>
+      </p:sp>
+      <p:sp>
+        <p:nvSpPr>
+          <p:cNvPr id="3" name="Content Placeholder 2">
+            <a:extLst>
+              <a:ext uri="{FF2B5EF4-FFF2-40B4-BE49-F238E27FC236}">
+                <a16:creationId xmlns:a16="http://schemas.microsoft.com/office/drawing/2014/main" id="{96A4A026-5801-B41D-FFEC-D416489E2077}"/>
+              </a:ext>
+            </a:extLst>
+          </p:cNvPr>
+          <p:cNvSpPr>
+            <a:spLocks noGrp="1"/>
+          </p:cNvSpPr>
+          <p:nvPr>
+            <p:ph idx="1"/>
+          </p:nvPr>
+        </p:nvSpPr>
+        <p:spPr>
+          <a:xfrm>
+            <a:off x="-1" y="2292506"/>
+            <a:ext cx="8495515" cy="3566873"/>
+          </a:xfrm>
+        </p:spPr>
+        <p:txBody>
+          <a:bodyPr>
+            <a:normAutofit/>
+          </a:bodyPr>
+          <a:lstStyle/>
+          <a:p>
+            <a:r>
+              <a:rPr lang="en-US" dirty="0"/>
+              <a:t>Training a semi-ok generative model (or other big stuff) takes a while. </a:t>
+            </a:r>
+          </a:p>
+          <a:p>
+            <a:pPr lvl="1"/>
+            <a:r>
+              <a:rPr lang="en-US" dirty="0"/>
+              <a:t>Things can also crash or be disconnected. </a:t>
+            </a:r>
+          </a:p>
+          <a:p>
+            <a:r>
+              <a:rPr lang="en-US" dirty="0"/>
+              <a:t>It is a good idea to save weights. </a:t>
+            </a:r>
+          </a:p>
+          <a:p>
+            <a:r>
+              <a:rPr lang="en-US" dirty="0"/>
+              <a:t>Training can be restored by loading weights and starting training loop. </a:t>
+            </a:r>
+          </a:p>
+          <a:p>
+            <a:r>
+              <a:rPr lang="en-US" dirty="0"/>
+              <a:t>Example show connection to google drive. </a:t>
+            </a:r>
+          </a:p>
+          <a:p>
+            <a:r>
+              <a:rPr lang="en-US" dirty="0"/>
+              <a:t>Put it in with early stopping!</a:t>
+            </a:r>
+          </a:p>
+        </p:txBody>
+      </p:sp>
+      <p:pic>
+        <p:nvPicPr>
+          <p:cNvPr id="4" name="Picture 3">
+            <a:extLst>
+              <a:ext uri="{FF2B5EF4-FFF2-40B4-BE49-F238E27FC236}">
+                <a16:creationId xmlns:a16="http://schemas.microsoft.com/office/drawing/2014/main" id="{BEA19658-6A2C-4F27-AE22-E27C98A25C28}"/>
+              </a:ext>
+            </a:extLst>
+          </p:cNvPr>
+          <p:cNvPicPr>
+            <a:picLocks noChangeAspect="1"/>
+          </p:cNvPicPr>
+          <p:nvPr/>
+        </p:nvPicPr>
+        <p:blipFill>
+          <a:blip r:embed="rId2"/>
+          <a:stretch>
+            <a:fillRect/>
+          </a:stretch>
+        </p:blipFill>
+        <p:spPr>
+          <a:xfrm>
+            <a:off x="6942220" y="9632"/>
+            <a:ext cx="5256103" cy="2282874"/>
+          </a:xfrm>
+          <a:prstGeom prst="rect">
+            <a:avLst/>
+          </a:prstGeom>
+        </p:spPr>
+      </p:pic>
+      <p:pic>
+        <p:nvPicPr>
+          <p:cNvPr id="5" name="Picture 4">
+            <a:extLst>
+              <a:ext uri="{FF2B5EF4-FFF2-40B4-BE49-F238E27FC236}">
+                <a16:creationId xmlns:a16="http://schemas.microsoft.com/office/drawing/2014/main" id="{E78FB558-0D12-47C6-BE65-517331087F7B}"/>
+              </a:ext>
+            </a:extLst>
+          </p:cNvPr>
+          <p:cNvPicPr>
+            <a:picLocks noChangeAspect="1"/>
+          </p:cNvPicPr>
+          <p:nvPr/>
+        </p:nvPicPr>
+        <p:blipFill>
+          <a:blip r:embed="rId3"/>
+          <a:stretch>
+            <a:fillRect/>
+          </a:stretch>
+        </p:blipFill>
+        <p:spPr>
+          <a:xfrm>
+            <a:off x="4164815" y="5004247"/>
+            <a:ext cx="4330700" cy="1854200"/>
+          </a:xfrm>
+          <a:prstGeom prst="rect">
+            <a:avLst/>
+          </a:prstGeom>
+        </p:spPr>
+      </p:pic>
+      <p:pic>
+        <p:nvPicPr>
+          <p:cNvPr id="6" name="Picture 5">
+            <a:extLst>
+              <a:ext uri="{FF2B5EF4-FFF2-40B4-BE49-F238E27FC236}">
+                <a16:creationId xmlns:a16="http://schemas.microsoft.com/office/drawing/2014/main" id="{F807AF8D-3D4F-5E65-7A5D-1A91673EECE0}"/>
+              </a:ext>
+            </a:extLst>
+          </p:cNvPr>
+          <p:cNvPicPr>
+            <a:picLocks noChangeAspect="1"/>
+          </p:cNvPicPr>
+          <p:nvPr/>
+        </p:nvPicPr>
+        <p:blipFill>
+          <a:blip r:embed="rId4"/>
+          <a:stretch>
+            <a:fillRect/>
+          </a:stretch>
+        </p:blipFill>
+        <p:spPr>
+          <a:xfrm>
+            <a:off x="8501838" y="2292506"/>
+            <a:ext cx="3690162" cy="4669589"/>
+          </a:xfrm>
+          <a:prstGeom prst="rect">
+            <a:avLst/>
+          </a:prstGeom>
+        </p:spPr>
+      </p:pic>
+    </p:spTree>
+    <p:extLst>
+      <p:ext uri="{BB962C8B-B14F-4D97-AF65-F5344CB8AC3E}">
+        <p14:creationId xmlns:p14="http://schemas.microsoft.com/office/powerpoint/2010/main" val="1700631507"/>
+      </p:ext>
+    </p:extLst>
+  </p:cSld>
+  <p:clrMapOvr>
+    <a:masterClrMapping/>
+  </p:clrMapOvr>
+</p:sld>
+</file>
+
+<file path=ppt/slides/slide34.xml><?xml version="1.0" encoding="utf-8"?>
 <p:sld xmlns:a="http://schemas.openxmlformats.org/drawingml/2006/main" xmlns:r="http://schemas.openxmlformats.org/officeDocument/2006/relationships" xmlns:p="http://schemas.openxmlformats.org/presentationml/2006/main" show="0">
   <p:cSld>
     <p:spTree>
@@ -5553,7 +7724,7 @@
 </p:sld>
 </file>
 
-<file path=ppt/slides/slide21.xml><?xml version="1.0" encoding="utf-8"?>
+<file path=ppt/slides/slide35.xml><?xml version="1.0" encoding="utf-8"?>
 <p:sld xmlns:a="http://schemas.openxmlformats.org/drawingml/2006/main" xmlns:r="http://schemas.openxmlformats.org/officeDocument/2006/relationships" xmlns:p="http://schemas.openxmlformats.org/presentationml/2006/main">
   <p:cSld>
     <p:spTree>
@@ -5662,19 +7833,6 @@
               <a:t>I heard a podcast where an ex-Open AI guy said the next generation would cost $1billion+ to train. </a:t>
             </a:r>
           </a:p>
-          <a:p>
-            <a:pPr lvl="1"/>
-            <a:r>
-              <a:rPr lang="en-US" dirty="0"/>
-              <a:t>I already trained the sample model, for at least 800 epochs, so this isn’t starting fresh. </a:t>
-            </a:r>
-          </a:p>
-          <a:p>
-            <a:r>
-              <a:rPr lang="en-US" dirty="0"/>
-              <a:t>There’s an example in the workbooks of both downloading and fine tuning a transformer model, and making one from scratch in the repository. </a:t>
-            </a:r>
-          </a:p>
         </p:txBody>
       </p:sp>
     </p:spTree>
@@ -5690,7 +7848,7 @@
 </p:sld>
 </file>
 
-<file path=ppt/slides/slide22.xml><?xml version="1.0" encoding="utf-8"?>
+<file path=ppt/slides/slide36.xml><?xml version="1.0" encoding="utf-8"?>
 <p:sld xmlns:a="http://schemas.openxmlformats.org/drawingml/2006/main" xmlns:r="http://schemas.openxmlformats.org/officeDocument/2006/relationships" xmlns:p="http://schemas.openxmlformats.org/presentationml/2006/main">
   <p:cSld>
     <p:spTree>
@@ -5759,7 +7917,7 @@
         </p:spPr>
         <p:txBody>
           <a:bodyPr>
-            <a:normAutofit/>
+            <a:normAutofit lnSpcReduction="10000"/>
           </a:bodyPr>
           <a:lstStyle/>
           <a:p>
@@ -5840,11 +7998,32 @@
             </a:r>
           </a:p>
           <a:p>
+            <a:pPr lvl="1"/>
+            <a:r>
+              <a:rPr lang="en-US" sz="2000" dirty="0">
+                <a:sym typeface="Wingdings" pitchFamily="2" charset="2"/>
+              </a:rPr>
+              <a:t>Look for contracts, mat. leaves, as well as BI/rpt. jobs (ideally w/ other connection)</a:t>
+            </a:r>
+          </a:p>
+          <a:p>
             <a:r>
               <a:rPr lang="en-US" sz="2200" dirty="0">
                 <a:sym typeface="Wingdings" pitchFamily="2" charset="2"/>
               </a:rPr>
-              <a:t>Look for contracts, mat. leaves, as well as BI/rpt. jobs (ideally w/ other connection)</a:t>
+              <a:t>For DS - Some agent-y examples are likely good use AI </a:t>
+            </a:r>
+            <a:r>
+              <a:rPr lang="en-US" sz="2200" dirty="0" err="1">
+                <a:sym typeface="Wingdings" pitchFamily="2" charset="2"/>
+              </a:rPr>
+              <a:t>apis</a:t>
+            </a:r>
+            <a:r>
+              <a:rPr lang="en-US" sz="2200" dirty="0">
+                <a:sym typeface="Wingdings" pitchFamily="2" charset="2"/>
+              </a:rPr>
+              <a:t> to do something else. </a:t>
             </a:r>
             <a:endParaRPr lang="en-US" sz="2200" dirty="0"/>
           </a:p>
@@ -5863,7 +8042,7 @@
 </p:sld>
 </file>
 
-<file path=ppt/slides/slide3.xml><?xml version="1.0" encoding="utf-8"?>
+<file path=ppt/slides/slide4.xml><?xml version="1.0" encoding="utf-8"?>
 <p:sld xmlns:a="http://schemas.openxmlformats.org/drawingml/2006/main" xmlns:r="http://schemas.openxmlformats.org/officeDocument/2006/relationships" xmlns:p="http://schemas.openxmlformats.org/presentationml/2006/main">
   <p:cSld>
     <p:spTree>
@@ -6000,7 +8179,7 @@
 </p:sld>
 </file>
 
-<file path=ppt/slides/slide4.xml><?xml version="1.0" encoding="utf-8"?>
+<file path=ppt/slides/slide5.xml><?xml version="1.0" encoding="utf-8"?>
 <p:sld xmlns:a="http://schemas.openxmlformats.org/drawingml/2006/main" xmlns:r="http://schemas.openxmlformats.org/officeDocument/2006/relationships" xmlns:p="http://schemas.openxmlformats.org/presentationml/2006/main">
   <p:cSld>
     <p:spTree>
@@ -6127,7 +8306,7 @@
 </p:sld>
 </file>
 
-<file path=ppt/slides/slide5.xml><?xml version="1.0" encoding="utf-8"?>
+<file path=ppt/slides/slide6.xml><?xml version="1.0" encoding="utf-8"?>
 <p:sld xmlns:a="http://schemas.openxmlformats.org/drawingml/2006/main" xmlns:r="http://schemas.openxmlformats.org/officeDocument/2006/relationships" xmlns:p="http://schemas.openxmlformats.org/presentationml/2006/main">
   <p:cSld>
     <p:spTree>
@@ -6149,6 +8328,235 @@
           <p:cNvPr id="2" name="Title 1">
             <a:extLst>
               <a:ext uri="{FF2B5EF4-FFF2-40B4-BE49-F238E27FC236}">
+                <a16:creationId xmlns:a16="http://schemas.microsoft.com/office/drawing/2014/main" id="{391C99AF-ABCB-C379-727E-DCEC318619C1}"/>
+              </a:ext>
+            </a:extLst>
+          </p:cNvPr>
+          <p:cNvSpPr>
+            <a:spLocks noGrp="1"/>
+          </p:cNvSpPr>
+          <p:nvPr>
+            <p:ph type="title"/>
+          </p:nvPr>
+        </p:nvSpPr>
+        <p:spPr>
+          <a:xfrm>
+            <a:off x="1" y="804519"/>
+            <a:ext cx="11054854" cy="1049235"/>
+          </a:xfrm>
+        </p:spPr>
+        <p:txBody>
+          <a:bodyPr/>
+          <a:lstStyle/>
+          <a:p>
+            <a:r>
+              <a:rPr lang="en-US" dirty="0"/>
+              <a:t>Why does this help and matter?</a:t>
+            </a:r>
+          </a:p>
+        </p:txBody>
+      </p:sp>
+      <p:sp>
+        <p:nvSpPr>
+          <p:cNvPr id="3" name="Content Placeholder 2">
+            <a:extLst>
+              <a:ext uri="{FF2B5EF4-FFF2-40B4-BE49-F238E27FC236}">
+                <a16:creationId xmlns:a16="http://schemas.microsoft.com/office/drawing/2014/main" id="{057A01FE-2862-DE6B-0F4A-8D23EE7C36D8}"/>
+              </a:ext>
+            </a:extLst>
+          </p:cNvPr>
+          <p:cNvSpPr>
+            <a:spLocks noGrp="1"/>
+          </p:cNvSpPr>
+          <p:nvPr>
+            <p:ph idx="1"/>
+          </p:nvPr>
+        </p:nvSpPr>
+        <p:spPr>
+          <a:xfrm>
+            <a:off x="4216065" y="2015732"/>
+            <a:ext cx="6838789" cy="4037749"/>
+          </a:xfrm>
+        </p:spPr>
+        <p:txBody>
+          <a:bodyPr/>
+          <a:lstStyle/>
+          <a:p>
+            <a:r>
+              <a:rPr lang="en-US" dirty="0"/>
+              <a:t>Predicting the next item is what time series models do. </a:t>
+            </a:r>
+          </a:p>
+          <a:p>
+            <a:r>
+              <a:rPr lang="en-US" dirty="0"/>
+              <a:t>Natural language is kind of a special application of that. </a:t>
+            </a:r>
+          </a:p>
+          <a:p>
+            <a:r>
+              <a:rPr lang="en-US" dirty="0"/>
+              <a:t>In a sentence, different parts impact other parts, e.g.</a:t>
+            </a:r>
+          </a:p>
+          <a:p>
+            <a:pPr lvl="1"/>
+            <a:r>
+              <a:rPr lang="en-US" dirty="0"/>
+              <a:t>“The dancer is backing that ass up” vs “the donkey trainer is backing that ass up”. </a:t>
+            </a:r>
+          </a:p>
+          <a:p>
+            <a:pPr lvl="1"/>
+            <a:r>
+              <a:rPr lang="en-US" dirty="0"/>
+              <a:t>The subject of the sentence totally changes meaning. </a:t>
+            </a:r>
+          </a:p>
+          <a:p>
+            <a:r>
+              <a:rPr lang="en-US" dirty="0"/>
+              <a:t>The states of the LSTM (hopefully) help the model know this. </a:t>
+            </a:r>
+          </a:p>
+          <a:p>
+            <a:pPr lvl="1"/>
+            <a:r>
+              <a:rPr lang="en-US" dirty="0"/>
+              <a:t>What from the previous info should impact next prediction. </a:t>
+            </a:r>
+          </a:p>
+        </p:txBody>
+      </p:sp>
+      <p:pic>
+        <p:nvPicPr>
+          <p:cNvPr id="4098" name="Picture 2" descr="Back Dat Ass Up&quot; Sticker for Sale by Tanis-Tweedale | Redbubble">
+            <a:extLst>
+              <a:ext uri="{FF2B5EF4-FFF2-40B4-BE49-F238E27FC236}">
+                <a16:creationId xmlns:a16="http://schemas.microsoft.com/office/drawing/2014/main" id="{E009EB54-3168-062F-8B59-17A788218EC8}"/>
+              </a:ext>
+            </a:extLst>
+          </p:cNvPr>
+          <p:cNvPicPr>
+            <a:picLocks noChangeAspect="1" noChangeArrowheads="1"/>
+          </p:cNvPicPr>
+          <p:nvPr/>
+        </p:nvPicPr>
+        <p:blipFill rotWithShape="1">
+          <a:blip r:embed="rId2">
+            <a:extLst>
+              <a:ext uri="{28A0092B-C50C-407E-A947-70E740481C1C}">
+                <a14:useLocalDpi xmlns:a14="http://schemas.microsoft.com/office/drawing/2010/main" val="0"/>
+              </a:ext>
+            </a:extLst>
+          </a:blip>
+          <a:srcRect t="5263" b="5088"/>
+          <a:stretch>
+            <a:fillRect/>
+          </a:stretch>
+        </p:blipFill>
+        <p:spPr bwMode="auto">
+          <a:xfrm>
+            <a:off x="321440" y="1853754"/>
+            <a:ext cx="3894625" cy="4655331"/>
+          </a:xfrm>
+          <a:prstGeom prst="rect">
+            <a:avLst/>
+          </a:prstGeom>
+          <a:noFill/>
+          <a:extLst>
+            <a:ext uri="{909E8E84-426E-40DD-AFC4-6F175D3DCCD1}">
+              <a14:hiddenFill xmlns:a14="http://schemas.microsoft.com/office/drawing/2010/main">
+                <a:solidFill>
+                  <a:srgbClr val="FFFFFF"/>
+                </a:solidFill>
+              </a14:hiddenFill>
+            </a:ext>
+          </a:extLst>
+        </p:spPr>
+      </p:pic>
+      <p:pic>
+        <p:nvPicPr>
+          <p:cNvPr id="4100" name="Picture 4" descr="A simple overview of RNN, LSTM and Attention Mechanism | by Manu Chauhan |  The Startup | Medium">
+            <a:extLst>
+              <a:ext uri="{FF2B5EF4-FFF2-40B4-BE49-F238E27FC236}">
+                <a16:creationId xmlns:a16="http://schemas.microsoft.com/office/drawing/2014/main" id="{C7114A2D-A147-99AF-EED5-9E20F8BDD53F}"/>
+              </a:ext>
+            </a:extLst>
+          </p:cNvPr>
+          <p:cNvPicPr>
+            <a:picLocks noChangeAspect="1" noChangeArrowheads="1"/>
+          </p:cNvPicPr>
+          <p:nvPr/>
+        </p:nvPicPr>
+        <p:blipFill>
+          <a:blip r:embed="rId3">
+            <a:extLst>
+              <a:ext uri="{28A0092B-C50C-407E-A947-70E740481C1C}">
+                <a14:useLocalDpi xmlns:a14="http://schemas.microsoft.com/office/drawing/2010/main" val="0"/>
+              </a:ext>
+            </a:extLst>
+          </a:blip>
+          <a:srcRect/>
+          <a:stretch>
+            <a:fillRect/>
+          </a:stretch>
+        </p:blipFill>
+        <p:spPr bwMode="auto">
+          <a:xfrm>
+            <a:off x="7014411" y="-21774"/>
+            <a:ext cx="5177589" cy="1875528"/>
+          </a:xfrm>
+          <a:prstGeom prst="rect">
+            <a:avLst/>
+          </a:prstGeom>
+          <a:noFill/>
+          <a:extLst>
+            <a:ext uri="{909E8E84-426E-40DD-AFC4-6F175D3DCCD1}">
+              <a14:hiddenFill xmlns:a14="http://schemas.microsoft.com/office/drawing/2010/main">
+                <a:solidFill>
+                  <a:srgbClr val="FFFFFF"/>
+                </a:solidFill>
+              </a14:hiddenFill>
+            </a:ext>
+          </a:extLst>
+        </p:spPr>
+      </p:pic>
+    </p:spTree>
+    <p:extLst>
+      <p:ext uri="{BB962C8B-B14F-4D97-AF65-F5344CB8AC3E}">
+        <p14:creationId xmlns:p14="http://schemas.microsoft.com/office/powerpoint/2010/main" val="2417201137"/>
+      </p:ext>
+    </p:extLst>
+  </p:cSld>
+  <p:clrMapOvr>
+    <a:masterClrMapping/>
+  </p:clrMapOvr>
+</p:sld>
+</file>
+
+<file path=ppt/slides/slide7.xml><?xml version="1.0" encoding="utf-8"?>
+<p:sld xmlns:a="http://schemas.openxmlformats.org/drawingml/2006/main" xmlns:r="http://schemas.openxmlformats.org/officeDocument/2006/relationships" xmlns:p="http://schemas.openxmlformats.org/presentationml/2006/main">
+  <p:cSld>
+    <p:spTree>
+      <p:nvGrpSpPr>
+        <p:cNvPr id="1" name=""/>
+        <p:cNvGrpSpPr/>
+        <p:nvPr/>
+      </p:nvGrpSpPr>
+      <p:grpSpPr>
+        <a:xfrm>
+          <a:off x="0" y="0"/>
+          <a:ext cx="0" cy="0"/>
+          <a:chOff x="0" y="0"/>
+          <a:chExt cx="0" cy="0"/>
+        </a:xfrm>
+      </p:grpSpPr>
+      <p:sp>
+        <p:nvSpPr>
+          <p:cNvPr id="2" name="Title 1">
+            <a:extLst>
+              <a:ext uri="{FF2B5EF4-FFF2-40B4-BE49-F238E27FC236}">
                 <a16:creationId xmlns:a16="http://schemas.microsoft.com/office/drawing/2014/main" id="{BE9070BA-981C-9181-8AC3-97C1097C3027}"/>
               </a:ext>
             </a:extLst>
@@ -6269,7 +8677,7 @@
 </p:sld>
 </file>
 
-<file path=ppt/slides/slide6.xml><?xml version="1.0" encoding="utf-8"?>
+<file path=ppt/slides/slide8.xml><?xml version="1.0" encoding="utf-8"?>
 <p:sld xmlns:a="http://schemas.openxmlformats.org/drawingml/2006/main" xmlns:r="http://schemas.openxmlformats.org/officeDocument/2006/relationships" xmlns:p="http://schemas.openxmlformats.org/presentationml/2006/main">
   <p:cSld>
     <p:spTree>
@@ -6475,282 +8883,6 @@
 </p:sld>
 </file>
 
-<file path=ppt/slides/slide7.xml><?xml version="1.0" encoding="utf-8"?>
-<p:sld xmlns:a="http://schemas.openxmlformats.org/drawingml/2006/main" xmlns:r="http://schemas.openxmlformats.org/officeDocument/2006/relationships" xmlns:p="http://schemas.openxmlformats.org/presentationml/2006/main">
-  <p:cSld>
-    <p:spTree>
-      <p:nvGrpSpPr>
-        <p:cNvPr id="1" name=""/>
-        <p:cNvGrpSpPr/>
-        <p:nvPr/>
-      </p:nvGrpSpPr>
-      <p:grpSpPr>
-        <a:xfrm>
-          <a:off x="0" y="0"/>
-          <a:ext cx="0" cy="0"/>
-          <a:chOff x="0" y="0"/>
-          <a:chExt cx="0" cy="0"/>
-        </a:xfrm>
-      </p:grpSpPr>
-      <p:sp>
-        <p:nvSpPr>
-          <p:cNvPr id="2" name="Title 1">
-            <a:extLst>
-              <a:ext uri="{FF2B5EF4-FFF2-40B4-BE49-F238E27FC236}">
-                <a16:creationId xmlns:a16="http://schemas.microsoft.com/office/drawing/2014/main" id="{D5A7217F-29B9-0F13-1827-E29CCF7EB1B3}"/>
-              </a:ext>
-            </a:extLst>
-          </p:cNvPr>
-          <p:cNvSpPr>
-            <a:spLocks noGrp="1"/>
-          </p:cNvSpPr>
-          <p:nvPr>
-            <p:ph type="title"/>
-          </p:nvPr>
-        </p:nvSpPr>
-        <p:spPr/>
-        <p:txBody>
-          <a:bodyPr/>
-          <a:lstStyle/>
-          <a:p>
-            <a:r>
-              <a:rPr lang="en-US" dirty="0"/>
-              <a:t>Predicting Text</a:t>
-            </a:r>
-          </a:p>
-        </p:txBody>
-      </p:sp>
-      <p:sp>
-        <p:nvSpPr>
-          <p:cNvPr id="3" name="Content Placeholder 2">
-            <a:extLst>
-              <a:ext uri="{FF2B5EF4-FFF2-40B4-BE49-F238E27FC236}">
-                <a16:creationId xmlns:a16="http://schemas.microsoft.com/office/drawing/2014/main" id="{D54C3147-248D-7FA1-5D5F-44A93AD7225A}"/>
-              </a:ext>
-            </a:extLst>
-          </p:cNvPr>
-          <p:cNvSpPr>
-            <a:spLocks noGrp="1"/>
-          </p:cNvSpPr>
-          <p:nvPr>
-            <p:ph idx="1"/>
-          </p:nvPr>
-        </p:nvSpPr>
-        <p:spPr>
-          <a:xfrm>
-            <a:off x="1451579" y="2015732"/>
-            <a:ext cx="9603275" cy="4037749"/>
-          </a:xfrm>
-        </p:spPr>
-        <p:txBody>
-          <a:bodyPr/>
-          <a:lstStyle/>
-          <a:p>
-            <a:r>
-              <a:rPr lang="en-US" dirty="0"/>
-              <a:t>Text is one of the things that has temporal relationships in the data. </a:t>
-            </a:r>
-          </a:p>
-          <a:p>
-            <a:pPr lvl="1"/>
-            <a:r>
-              <a:rPr lang="en-US" dirty="0"/>
-              <a:t>The order of words matter, as does what came earlier in the sequence. </a:t>
-            </a:r>
-          </a:p>
-          <a:p>
-            <a:r>
-              <a:rPr lang="en-US" dirty="0"/>
-              <a:t>We can use a model to predict the next word, or set of words. </a:t>
-            </a:r>
-          </a:p>
-          <a:p>
-            <a:pPr lvl="1"/>
-            <a:r>
-              <a:rPr lang="en-US" dirty="0"/>
-              <a:t>Input – previous tokens. </a:t>
-            </a:r>
-          </a:p>
-          <a:p>
-            <a:pPr lvl="1"/>
-            <a:r>
-              <a:rPr lang="en-US" dirty="0"/>
-              <a:t>Output – next token(s). </a:t>
-            </a:r>
-          </a:p>
-          <a:p>
-            <a:r>
-              <a:rPr lang="en-US" dirty="0"/>
-              <a:t>A piece of text is a weird time-series of words. </a:t>
-            </a:r>
-          </a:p>
-          <a:p>
-            <a:r>
-              <a:rPr lang="en-US" dirty="0"/>
-              <a:t>We can make a model that predicts the next word, then the next, </a:t>
-            </a:r>
-            <a:r>
-              <a:rPr lang="en-US" dirty="0" err="1"/>
-              <a:t>etc</a:t>
-            </a:r>
-            <a:r>
-              <a:rPr lang="en-US" dirty="0"/>
-              <a:t>…</a:t>
-            </a:r>
-          </a:p>
-          <a:p>
-            <a:pPr lvl="1"/>
-            <a:r>
-              <a:rPr lang="en-US" dirty="0"/>
-              <a:t>Eventually, we’ll basically have Siri. </a:t>
-            </a:r>
-          </a:p>
-        </p:txBody>
-      </p:sp>
-    </p:spTree>
-    <p:extLst>
-      <p:ext uri="{BB962C8B-B14F-4D97-AF65-F5344CB8AC3E}">
-        <p14:creationId xmlns:p14="http://schemas.microsoft.com/office/powerpoint/2010/main" val="3829140797"/>
-      </p:ext>
-    </p:extLst>
-  </p:cSld>
-  <p:clrMapOvr>
-    <a:masterClrMapping/>
-  </p:clrMapOvr>
-</p:sld>
-</file>
-
-<file path=ppt/slides/slide8.xml><?xml version="1.0" encoding="utf-8"?>
-<p:sld xmlns:a="http://schemas.openxmlformats.org/drawingml/2006/main" xmlns:r="http://schemas.openxmlformats.org/officeDocument/2006/relationships" xmlns:p="http://schemas.openxmlformats.org/presentationml/2006/main">
-  <p:cSld>
-    <p:spTree>
-      <p:nvGrpSpPr>
-        <p:cNvPr id="1" name=""/>
-        <p:cNvGrpSpPr/>
-        <p:nvPr/>
-      </p:nvGrpSpPr>
-      <p:grpSpPr>
-        <a:xfrm>
-          <a:off x="0" y="0"/>
-          <a:ext cx="0" cy="0"/>
-          <a:chOff x="0" y="0"/>
-          <a:chExt cx="0" cy="0"/>
-        </a:xfrm>
-      </p:grpSpPr>
-      <p:sp>
-        <p:nvSpPr>
-          <p:cNvPr id="2" name="Title 1">
-            <a:extLst>
-              <a:ext uri="{FF2B5EF4-FFF2-40B4-BE49-F238E27FC236}">
-                <a16:creationId xmlns:a16="http://schemas.microsoft.com/office/drawing/2014/main" id="{302C9F35-C90B-D7C2-C0E2-FCFBC469A15D}"/>
-              </a:ext>
-            </a:extLst>
-          </p:cNvPr>
-          <p:cNvSpPr>
-            <a:spLocks noGrp="1"/>
-          </p:cNvSpPr>
-          <p:nvPr>
-            <p:ph type="title"/>
-          </p:nvPr>
-        </p:nvSpPr>
-        <p:spPr/>
-        <p:txBody>
-          <a:bodyPr/>
-          <a:lstStyle/>
-          <a:p>
-            <a:r>
-              <a:rPr lang="en-US" dirty="0"/>
-              <a:t>Forget predicting, what about Generating Text?</a:t>
-            </a:r>
-          </a:p>
-        </p:txBody>
-      </p:sp>
-      <p:sp>
-        <p:nvSpPr>
-          <p:cNvPr id="3" name="Content Placeholder 2">
-            <a:extLst>
-              <a:ext uri="{FF2B5EF4-FFF2-40B4-BE49-F238E27FC236}">
-                <a16:creationId xmlns:a16="http://schemas.microsoft.com/office/drawing/2014/main" id="{0925384A-745F-0025-99F6-F0EF8325AB34}"/>
-              </a:ext>
-            </a:extLst>
-          </p:cNvPr>
-          <p:cNvSpPr>
-            <a:spLocks noGrp="1"/>
-          </p:cNvSpPr>
-          <p:nvPr>
-            <p:ph idx="1"/>
-          </p:nvPr>
-        </p:nvSpPr>
-        <p:spPr>
-          <a:xfrm>
-            <a:off x="1451579" y="2015732"/>
-            <a:ext cx="9603275" cy="4037749"/>
-          </a:xfrm>
-        </p:spPr>
-        <p:txBody>
-          <a:bodyPr/>
-          <a:lstStyle/>
-          <a:p>
-            <a:r>
-              <a:rPr lang="en-US" dirty="0"/>
-              <a:t>We can apply these LSTM models to predict the next word. </a:t>
-            </a:r>
-          </a:p>
-          <a:p>
-            <a:r>
-              <a:rPr lang="en-US" dirty="0"/>
-              <a:t>We can then tell it to generate that word!</a:t>
-            </a:r>
-          </a:p>
-          <a:p>
-            <a:r>
-              <a:rPr lang="en-US" dirty="0" err="1"/>
-              <a:t>ChatGPT</a:t>
-            </a:r>
-            <a:r>
-              <a:rPr lang="en-US" dirty="0"/>
-              <a:t>, watch out! </a:t>
-            </a:r>
-          </a:p>
-          <a:p>
-            <a:r>
-              <a:rPr lang="en-US" dirty="0"/>
-              <a:t>We just need to setup the data properly:</a:t>
-            </a:r>
-          </a:p>
-          <a:p>
-            <a:pPr lvl="1"/>
-            <a:r>
-              <a:rPr lang="en-US" dirty="0"/>
-              <a:t>The input is the previous set of words. </a:t>
-            </a:r>
-          </a:p>
-          <a:p>
-            <a:pPr lvl="1"/>
-            <a:r>
-              <a:rPr lang="en-US" dirty="0"/>
-              <a:t>The output is the next word. </a:t>
-            </a:r>
-          </a:p>
-          <a:p>
-            <a:pPr lvl="1"/>
-            <a:endParaRPr lang="en-US" dirty="0"/>
-          </a:p>
-        </p:txBody>
-      </p:sp>
-    </p:spTree>
-    <p:extLst>
-      <p:ext uri="{BB962C8B-B14F-4D97-AF65-F5344CB8AC3E}">
-        <p14:creationId xmlns:p14="http://schemas.microsoft.com/office/powerpoint/2010/main" val="1926563131"/>
-      </p:ext>
-    </p:extLst>
-  </p:cSld>
-  <p:clrMapOvr>
-    <a:masterClrMapping/>
-  </p:clrMapOvr>
-</p:sld>
-</file>
-
 <file path=ppt/slides/slide9.xml><?xml version="1.0" encoding="utf-8"?>
 <p:sld xmlns:a="http://schemas.openxmlformats.org/drawingml/2006/main" xmlns:r="http://schemas.openxmlformats.org/officeDocument/2006/relationships" xmlns:p="http://schemas.openxmlformats.org/presentationml/2006/main">
   <p:cSld>
@@ -6773,7 +8905,7 @@
           <p:cNvPr id="2" name="Title 1">
             <a:extLst>
               <a:ext uri="{FF2B5EF4-FFF2-40B4-BE49-F238E27FC236}">
-                <a16:creationId xmlns:a16="http://schemas.microsoft.com/office/drawing/2014/main" id="{579C3E18-8339-2DD9-4BED-8AEE908C849A}"/>
+                <a16:creationId xmlns:a16="http://schemas.microsoft.com/office/drawing/2014/main" id="{D5A7217F-29B9-0F13-1827-E29CCF7EB1B3}"/>
               </a:ext>
             </a:extLst>
           </p:cNvPr>
@@ -6789,7 +8921,10 @@
           <a:bodyPr/>
           <a:lstStyle/>
           <a:p>
-            <a:endParaRPr lang="en-US"/>
+            <a:r>
+              <a:rPr lang="en-US" dirty="0"/>
+              <a:t>Predicting Text</a:t>
+            </a:r>
           </a:p>
         </p:txBody>
       </p:sp>
@@ -6798,7 +8933,7 @@
           <p:cNvPr id="3" name="Content Placeholder 2">
             <a:extLst>
               <a:ext uri="{FF2B5EF4-FFF2-40B4-BE49-F238E27FC236}">
-                <a16:creationId xmlns:a16="http://schemas.microsoft.com/office/drawing/2014/main" id="{C87CC73E-455F-0224-0F28-2E8A36AF8856}"/>
+                <a16:creationId xmlns:a16="http://schemas.microsoft.com/office/drawing/2014/main" id="{D54C3147-248D-7FA1-5D5F-44A93AD7225A}"/>
               </a:ext>
             </a:extLst>
           </p:cNvPr>
@@ -6809,66 +8944,81 @@
             <p:ph idx="1"/>
           </p:nvPr>
         </p:nvSpPr>
-        <p:spPr/>
-        <p:txBody>
-          <a:bodyPr/>
-          <a:lstStyle/>
-          <a:p>
-            <a:endParaRPr lang="en-US"/>
-          </a:p>
-        </p:txBody>
-      </p:sp>
-      <p:pic>
-        <p:nvPicPr>
-          <p:cNvPr id="2050" name="Picture 2" descr="Text Generation using LSTM">
-            <a:extLst>
-              <a:ext uri="{FF2B5EF4-FFF2-40B4-BE49-F238E27FC236}">
-                <a16:creationId xmlns:a16="http://schemas.microsoft.com/office/drawing/2014/main" id="{38AC7608-B39E-C2E6-D83B-4ED54AD42F6F}"/>
-              </a:ext>
-            </a:extLst>
-          </p:cNvPr>
-          <p:cNvPicPr>
-            <a:picLocks noChangeAspect="1" noChangeArrowheads="1"/>
-          </p:cNvPicPr>
-          <p:nvPr/>
-        </p:nvPicPr>
-        <p:blipFill>
-          <a:blip r:embed="rId2">
-            <a:extLst>
-              <a:ext uri="{28A0092B-C50C-407E-A947-70E740481C1C}">
-                <a14:useLocalDpi xmlns:a14="http://schemas.microsoft.com/office/drawing/2010/main" val="0"/>
-              </a:ext>
-            </a:extLst>
-          </a:blip>
-          <a:srcRect/>
-          <a:stretch>
-            <a:fillRect/>
-          </a:stretch>
-        </p:blipFill>
-        <p:spPr bwMode="auto">
+        <p:spPr>
           <a:xfrm>
-            <a:off x="0" y="1333500"/>
-            <a:ext cx="12192000" cy="4191000"/>
+            <a:off x="1451579" y="2015732"/>
+            <a:ext cx="9603275" cy="4037749"/>
           </a:xfrm>
-          <a:prstGeom prst="rect">
-            <a:avLst/>
-          </a:prstGeom>
-          <a:noFill/>
-          <a:extLst>
-            <a:ext uri="{909E8E84-426E-40DD-AFC4-6F175D3DCCD1}">
-              <a14:hiddenFill xmlns:a14="http://schemas.microsoft.com/office/drawing/2010/main">
-                <a:solidFill>
-                  <a:srgbClr val="FFFFFF"/>
-                </a:solidFill>
-              </a14:hiddenFill>
-            </a:ext>
-          </a:extLst>
         </p:spPr>
-      </p:pic>
+        <p:txBody>
+          <a:bodyPr/>
+          <a:lstStyle/>
+          <a:p>
+            <a:r>
+              <a:rPr lang="en-US" dirty="0"/>
+              <a:t>Text is one of the things that has temporal relationships in the data. </a:t>
+            </a:r>
+          </a:p>
+          <a:p>
+            <a:pPr lvl="1"/>
+            <a:r>
+              <a:rPr lang="en-US" dirty="0"/>
+              <a:t>The order of words matter, as does what came earlier in the sequence. </a:t>
+            </a:r>
+          </a:p>
+          <a:p>
+            <a:r>
+              <a:rPr lang="en-US" dirty="0"/>
+              <a:t>We can use a model to predict the next word, or set of words. </a:t>
+            </a:r>
+          </a:p>
+          <a:p>
+            <a:pPr lvl="1"/>
+            <a:r>
+              <a:rPr lang="en-US" dirty="0"/>
+              <a:t>Input – previous tokens. </a:t>
+            </a:r>
+          </a:p>
+          <a:p>
+            <a:pPr lvl="1"/>
+            <a:r>
+              <a:rPr lang="en-US" dirty="0"/>
+              <a:t>Output – next token(s). </a:t>
+            </a:r>
+          </a:p>
+          <a:p>
+            <a:r>
+              <a:rPr lang="en-US" dirty="0"/>
+              <a:t>A piece of text is a weird time-series of words. </a:t>
+            </a:r>
+          </a:p>
+          <a:p>
+            <a:r>
+              <a:rPr lang="en-US" dirty="0"/>
+              <a:t>We can make a model that predicts the next word, then the next, </a:t>
+            </a:r>
+            <a:r>
+              <a:rPr lang="en-US" dirty="0" err="1"/>
+              <a:t>etc</a:t>
+            </a:r>
+            <a:r>
+              <a:rPr lang="en-US" dirty="0"/>
+              <a:t>…</a:t>
+            </a:r>
+          </a:p>
+          <a:p>
+            <a:pPr lvl="1"/>
+            <a:r>
+              <a:rPr lang="en-US" dirty="0"/>
+              <a:t>Eventually, we’ll basically have Siri. </a:t>
+            </a:r>
+          </a:p>
+        </p:txBody>
+      </p:sp>
     </p:spTree>
     <p:extLst>
       <p:ext uri="{BB962C8B-B14F-4D97-AF65-F5344CB8AC3E}">
-        <p14:creationId xmlns:p14="http://schemas.microsoft.com/office/powerpoint/2010/main" val="119335658"/>
+        <p14:creationId xmlns:p14="http://schemas.microsoft.com/office/powerpoint/2010/main" val="3829140797"/>
       </p:ext>
     </p:extLst>
   </p:cSld>

--- a/reference_content/Slides/text_gen_lstm.pptx
+++ b/reference_content/Slides/text_gen_lstm.pptx
@@ -3723,7 +3723,7 @@
           <a:p>
             <a:r>
               <a:rPr lang="en-US" dirty="0"/>
-              <a:t>Generative models. (Ch8, first part. Has a character-by-character example). </a:t>
+              <a:t>Generative models. (pull please, I updated this earlier today)</a:t>
             </a:r>
           </a:p>
           <a:p>
@@ -3757,20 +3757,7 @@
             <a:pPr lvl="1"/>
             <a:r>
               <a:rPr lang="en-US" dirty="0"/>
-              <a:t>Bidirectional LSTM layers. </a:t>
-            </a:r>
-          </a:p>
-          <a:p>
-            <a:pPr lvl="1"/>
-            <a:r>
-              <a:rPr lang="en-US" dirty="0"/>
               <a:t>Temperature. </a:t>
-            </a:r>
-          </a:p>
-          <a:p>
-            <a:r>
-              <a:rPr lang="en-US" dirty="0"/>
-              <a:t>Go on summer vacation!</a:t>
             </a:r>
           </a:p>
         </p:txBody>
@@ -4983,8 +4970,8 @@
         </p:nvSpPr>
         <p:spPr>
           <a:xfrm>
-            <a:off x="5317958" y="1853753"/>
-            <a:ext cx="6874042" cy="4199727"/>
+            <a:off x="5905500" y="1853753"/>
+            <a:ext cx="6286500" cy="4199727"/>
           </a:xfrm>
         </p:spPr>
         <p:txBody>
@@ -5021,62 +5008,17 @@
           <a:p>
             <a:r>
               <a:rPr lang="en-US" dirty="0"/>
-              <a:t>Here, we’ll also </a:t>
-            </a:r>
-            <a:r>
-              <a:rPr lang="en-US" dirty="0" err="1"/>
-              <a:t>pad_packed_sequences</a:t>
-            </a:r>
-            <a:r>
-              <a:rPr lang="en-US" dirty="0"/>
-              <a:t>:</a:t>
-            </a:r>
-          </a:p>
-          <a:p>
-            <a:pPr lvl="1"/>
-            <a:r>
-              <a:rPr lang="en-US" dirty="0"/>
-              <a:t>Does the opposite, restores the padded parts. </a:t>
-            </a:r>
-          </a:p>
-          <a:p>
-            <a:r>
-              <a:rPr lang="en-US" dirty="0"/>
-              <a:t>This is ‘normal’ usage:</a:t>
-            </a:r>
-          </a:p>
-          <a:p>
-            <a:pPr lvl="1"/>
-            <a:r>
-              <a:rPr lang="en-US" dirty="0"/>
-              <a:t>Pack to model</a:t>
-            </a:r>
-          </a:p>
-          <a:p>
-            <a:pPr lvl="1"/>
-            <a:r>
-              <a:rPr lang="en-US" dirty="0"/>
-              <a:t>Pad back to original format. </a:t>
-            </a:r>
-          </a:p>
-          <a:p>
-            <a:pPr lvl="1"/>
-            <a:r>
-              <a:rPr lang="en-US" dirty="0"/>
-              <a:t>In the last example we grabbed the hidden state directly because it was binomial and we needed to manipulate it. </a:t>
-            </a:r>
-          </a:p>
-          <a:p>
-            <a:endParaRPr lang="en-US" dirty="0"/>
+              <a:t>The prediction is the next value. </a:t>
+            </a:r>
           </a:p>
         </p:txBody>
       </p:sp>
       <p:pic>
         <p:nvPicPr>
-          <p:cNvPr id="5" name="Picture 4">
-            <a:extLst>
-              <a:ext uri="{FF2B5EF4-FFF2-40B4-BE49-F238E27FC236}">
-                <a16:creationId xmlns:a16="http://schemas.microsoft.com/office/drawing/2014/main" id="{C90719DD-4E2A-EDAB-EFA5-330176DE51AA}"/>
+          <p:cNvPr id="6" name="Picture 5">
+            <a:extLst>
+              <a:ext uri="{FF2B5EF4-FFF2-40B4-BE49-F238E27FC236}">
+                <a16:creationId xmlns:a16="http://schemas.microsoft.com/office/drawing/2014/main" id="{961AFB2A-CD11-A4BC-76F2-811F3BBC076C}"/>
               </a:ext>
             </a:extLst>
           </p:cNvPr>
@@ -5087,15 +5029,14 @@
         </p:nvPicPr>
         <p:blipFill>
           <a:blip r:embed="rId2"/>
-          <a:srcRect r="31579"/>
           <a:stretch>
             <a:fillRect/>
           </a:stretch>
         </p:blipFill>
         <p:spPr>
           <a:xfrm>
-            <a:off x="0" y="1853754"/>
-            <a:ext cx="5317958" cy="4158804"/>
+            <a:off x="0" y="1853753"/>
+            <a:ext cx="5905500" cy="4826000"/>
           </a:xfrm>
           <a:prstGeom prst="rect">
             <a:avLst/>
@@ -5339,7 +5280,7 @@
             <a:pPr lvl="1"/>
             <a:r>
               <a:rPr lang="en-US" dirty="0"/>
-              <a:t>Vocabulary – mapping of token number to word.  </a:t>
+              <a:t>Vocabulary – mapping of token number to word. We need this anywhere we translate.   </a:t>
             </a:r>
           </a:p>
           <a:p>
@@ -7120,12 +7061,14 @@
         </p:nvSpPr>
         <p:spPr>
           <a:xfrm>
-            <a:off x="314433" y="1853755"/>
-            <a:ext cx="6098399" cy="4199726"/>
+            <a:off x="212559" y="1853755"/>
+            <a:ext cx="5779167" cy="4199726"/>
           </a:xfrm>
         </p:spPr>
         <p:txBody>
-          <a:bodyPr/>
+          <a:bodyPr>
+            <a:normAutofit lnSpcReduction="10000"/>
+          </a:bodyPr>
           <a:lstStyle/>
           <a:p>
             <a:r>
@@ -7176,22 +7119,23 @@
             <a:pPr lvl="1"/>
             <a:r>
               <a:rPr lang="en-US" dirty="0"/>
-              <a:t>A chat “tool” would call this to </a:t>
-            </a:r>
-            <a:r>
-              <a:rPr lang="en-US"/>
-              <a:t>get responses. </a:t>
-            </a:r>
-            <a:endParaRPr lang="en-US" dirty="0"/>
+              <a:t>A chat “tool” would call this to get responses. </a:t>
+            </a:r>
+          </a:p>
+          <a:p>
+            <a:r>
+              <a:rPr lang="en-US" dirty="0"/>
+              <a:t>&lt;UNK&gt; is the default, if a token is unknown. </a:t>
+            </a:r>
           </a:p>
         </p:txBody>
       </p:sp>
       <p:pic>
         <p:nvPicPr>
-          <p:cNvPr id="4" name="Picture 3">
-            <a:extLst>
-              <a:ext uri="{FF2B5EF4-FFF2-40B4-BE49-F238E27FC236}">
-                <a16:creationId xmlns:a16="http://schemas.microsoft.com/office/drawing/2014/main" id="{0D95FEB3-489B-9E0F-24FC-57A4FB1E230A}"/>
+          <p:cNvPr id="5" name="Picture 4">
+            <a:extLst>
+              <a:ext uri="{FF2B5EF4-FFF2-40B4-BE49-F238E27FC236}">
+                <a16:creationId xmlns:a16="http://schemas.microsoft.com/office/drawing/2014/main" id="{8123DBC2-02CF-B301-8B10-33066725133B}"/>
               </a:ext>
             </a:extLst>
           </p:cNvPr>
@@ -7202,15 +7146,14 @@
         </p:nvPicPr>
         <p:blipFill>
           <a:blip r:embed="rId2"/>
-          <a:srcRect r="25645"/>
           <a:stretch>
             <a:fillRect/>
           </a:stretch>
         </p:blipFill>
         <p:spPr>
           <a:xfrm>
-            <a:off x="6412832" y="1391655"/>
-            <a:ext cx="5779168" cy="4976507"/>
+            <a:off x="5991726" y="1380056"/>
+            <a:ext cx="6200274" cy="5442774"/>
           </a:xfrm>
           <a:prstGeom prst="rect">
             <a:avLst/>
@@ -7491,8 +7434,12 @@
           </a:p>
           <a:p>
             <a:r>
-              <a:rPr lang="en-US" dirty="0"/>
-              <a:t>Example show connection to google drive. </a:t>
+              <a:rPr lang="en-US"/>
+              <a:t>Example shows </a:t>
+            </a:r>
+            <a:r>
+              <a:rPr lang="en-US" dirty="0"/>
+              <a:t>connection to google drive. </a:t>
             </a:r>
           </a:p>
           <a:p>
